--- a/media/exports/reports/2025-10/cost-to-win.pptx
+++ b/media/exports/reports/2025-10/cost-to-win.pptx
@@ -330,7 +330,9 @@
     <a:lstStyle/>
     <a:p>
       <a:pPr>
-        <a:defRPr sz="1800"/>
+        <a:defRPr sz="1800">
+          <a:latin typeface="Roboto"/>
+        </a:defRPr>
       </a:pPr>
       <a:endParaRPr/>
     </a:p>
@@ -560,7 +562,9 @@
     <a:lstStyle/>
     <a:p>
       <a:pPr>
-        <a:defRPr sz="1800"/>
+        <a:defRPr sz="1800">
+          <a:latin typeface="Roboto"/>
+        </a:defRPr>
       </a:pPr>
       <a:endParaRPr/>
     </a:p>
@@ -3591,11 +3595,17 @@
           <a:bodyPr rtlCol="0" anchor="ctr"/>
           <a:lstStyle/>
           <a:p>
+            <a:pPr>
+              <a:defRPr>
+                <a:latin typeface="Roboto"/>
+              </a:defRPr>
+            </a:pPr>
             <a:r>
               <a:rPr sz="1600" b="1">
                 <a:solidFill>
                   <a:srgbClr val="FFFFFF"/>
                 </a:solidFill>
+                <a:latin typeface="Roboto"/>
               </a:rPr>
               <a:t>4th</a:t>
             </a:r>
@@ -3624,14 +3634,19 @@
           </a:bodyPr>
           <a:lstStyle/>
           <a:p>
+            <a:pPr>
+              <a:defRPr>
+                <a:latin typeface="Roboto"/>
+              </a:defRPr>
+            </a:pPr>
             <a:r>
               <a:rPr sz="1800" b="1">
                 <a:solidFill>
                   <a:srgbClr val="25342A"/>
                 </a:solidFill>
-                <a:latin typeface="Arial"/>
+                <a:latin typeface="Roboto"/>
               </a:rPr>
-              <a:t>The 4th Sheet</a:t>
+              <a:t>The Fourth Sheet</a:t>
             </a:r>
           </a:p>
         </p:txBody>
@@ -3658,12 +3673,17 @@
           </a:bodyPr>
           <a:lstStyle/>
           <a:p>
+            <a:pPr>
+              <a:defRPr>
+                <a:latin typeface="Roboto"/>
+              </a:defRPr>
+            </a:pPr>
             <a:r>
               <a:rPr sz="1100" b="1">
                 <a:solidFill>
                   <a:srgbClr val="8A7A52"/>
                 </a:solidFill>
-                <a:latin typeface="Arial"/>
+                <a:latin typeface="Roboto"/>
               </a:rPr>
               <a:t>SAMPLE DATA · invented figures for demonstration</a:t>
             </a:r>
@@ -3692,12 +3712,17 @@
           </a:bodyPr>
           <a:lstStyle/>
           <a:p>
+            <a:pPr>
+              <a:defRPr>
+                <a:latin typeface="Roboto"/>
+              </a:defRPr>
+            </a:pPr>
             <a:r>
               <a:rPr sz="3400" b="1">
                 <a:solidFill>
                   <a:srgbClr val="25342A"/>
                 </a:solidFill>
-                <a:latin typeface="Arial"/>
+                <a:latin typeface="Roboto"/>
               </a:rPr>
               <a:t>What does it cost to win a customer?</a:t>
             </a:r>
@@ -3726,12 +3751,17 @@
           </a:bodyPr>
           <a:lstStyle/>
           <a:p>
+            <a:pPr>
+              <a:defRPr>
+                <a:latin typeface="Roboto"/>
+              </a:defRPr>
+            </a:pPr>
             <a:r>
               <a:rPr sz="1600" b="0">
                 <a:solidFill>
                   <a:srgbClr val="5F6F63"/>
                 </a:solidFill>
-                <a:latin typeface="Arial"/>
+                <a:latin typeface="Roboto"/>
               </a:rPr>
               <a:t>Sample Electrical &amp; Air Pty Ltd</a:t>
             </a:r>
@@ -3760,12 +3790,17 @@
           </a:bodyPr>
           <a:lstStyle/>
           <a:p>
+            <a:pPr>
+              <a:defRPr>
+                <a:latin typeface="Roboto"/>
+              </a:defRPr>
+            </a:pPr>
             <a:r>
               <a:rPr sz="1400" b="0">
                 <a:solidFill>
                   <a:srgbClr val="25342A"/>
                 </a:solidFill>
-                <a:latin typeface="Arial"/>
+                <a:latin typeface="Roboto"/>
               </a:rPr>
               <a:t>Period: October 2025. Marketing spend divided by the customers it actually brought in (a customer's first ever job), month by month.</a:t>
             </a:r>
@@ -3794,45 +3829,65 @@
           </a:bodyPr>
           <a:lstStyle/>
           <a:p>
+            <a:pPr>
+              <a:defRPr>
+                <a:latin typeface="Roboto"/>
+              </a:defRPr>
+            </a:pPr>
             <a:r>
               <a:rPr sz="1100" b="0">
                 <a:solidFill>
                   <a:srgbClr val="5F6F63"/>
                 </a:solidFill>
-                <a:latin typeface="Arial"/>
+                <a:latin typeface="Roboto"/>
               </a:rPr>
               <a:t>How final is this data?</a:t>
             </a:r>
           </a:p>
           <a:p>
+            <a:pPr>
+              <a:defRPr>
+                <a:latin typeface="Roboto"/>
+              </a:defRPr>
+            </a:pPr>
             <a:r>
               <a:rPr sz="1100" b="0">
                 <a:solidFill>
                   <a:srgbClr val="5F6F63"/>
                 </a:solidFill>
-                <a:latin typeface="Arial"/>
+                <a:latin typeface="Roboto"/>
               </a:rPr>
               <a:t>September 2025: Locked. September 2025 is locked (closed 2 Oct 2025). These numbers won't change.</a:t>
             </a:r>
           </a:p>
           <a:p>
+            <a:pPr>
+              <a:defRPr>
+                <a:latin typeface="Roboto"/>
+              </a:defRPr>
+            </a:pPr>
             <a:r>
               <a:rPr sz="1100" b="0">
                 <a:solidFill>
                   <a:srgbClr val="5F6F63"/>
                 </a:solidFill>
-                <a:latin typeface="Arial"/>
+                <a:latin typeface="Roboto"/>
               </a:rPr>
               <a:t>October 2025: Locked. October 2025 is locked (closed 4 Nov 2025). These numbers won't change.</a:t>
             </a:r>
           </a:p>
           <a:p>
+            <a:pPr>
+              <a:defRPr>
+                <a:latin typeface="Roboto"/>
+              </a:defRPr>
+            </a:pPr>
             <a:r>
               <a:rPr sz="1100" b="0">
                 <a:solidFill>
                   <a:srgbClr val="5F6F63"/>
                 </a:solidFill>
-                <a:latin typeface="Arial"/>
+                <a:latin typeface="Roboto"/>
               </a:rPr>
               <a:t>October 2026: Incomplete. October 2026 is still in progress: figures to 6 Oct only.</a:t>
             </a:r>
@@ -3861,12 +3916,17 @@
           </a:bodyPr>
           <a:lstStyle/>
           <a:p>
+            <a:pPr>
+              <a:defRPr>
+                <a:latin typeface="Roboto"/>
+              </a:defRPr>
+            </a:pPr>
             <a:r>
               <a:rPr sz="900" b="0">
                 <a:solidFill>
                   <a:srgbClr val="5F6F63"/>
                 </a:solidFill>
-                <a:latin typeface="Arial"/>
+                <a:latin typeface="Roboto"/>
               </a:rPr>
               <a:t>cost-to-win.pptx</a:t>
             </a:r>
@@ -3895,13 +3955,17 @@
           </a:bodyPr>
           <a:lstStyle/>
           <a:p>
-            <a:pPr algn="ctr"/>
+            <a:pPr algn="ctr">
+              <a:defRPr>
+                <a:latin typeface="Roboto"/>
+              </a:defRPr>
+            </a:pPr>
             <a:r>
               <a:rPr sz="900" b="0">
                 <a:solidFill>
                   <a:srgbClr val="5F6F63"/>
                 </a:solidFill>
-                <a:latin typeface="Arial"/>
+                <a:latin typeface="Roboto"/>
               </a:rPr>
               <a:t>Data retrieved 2pm, Tue 6 Oct 2026 · Sample data</a:t>
             </a:r>
@@ -3930,13 +3994,17 @@
           </a:bodyPr>
           <a:lstStyle/>
           <a:p>
-            <a:pPr algn="r"/>
+            <a:pPr algn="r">
+              <a:defRPr>
+                <a:latin typeface="Roboto"/>
+              </a:defRPr>
+            </a:pPr>
             <a:r>
               <a:rPr sz="900" b="0">
                 <a:solidFill>
                   <a:srgbClr val="5F6F63"/>
                 </a:solidFill>
-                <a:latin typeface="Arial"/>
+                <a:latin typeface="Roboto"/>
               </a:rPr>
               <a:t>Slide 1 of 5</a:t>
             </a:r>
@@ -4000,7 +4068,11 @@
           <a:bodyPr rtlCol="0" anchor="ctr"/>
           <a:lstStyle/>
           <a:p>
-            <a:pPr algn="ctr"/>
+            <a:pPr algn="ctr">
+              <a:defRPr>
+                <a:latin typeface="Roboto"/>
+              </a:defRPr>
+            </a:pPr>
           </a:p>
         </p:txBody>
       </p:sp>
@@ -4026,12 +4098,17 @@
           </a:bodyPr>
           <a:lstStyle/>
           <a:p>
+            <a:pPr>
+              <a:defRPr>
+                <a:latin typeface="Roboto"/>
+              </a:defRPr>
+            </a:pPr>
             <a:r>
               <a:rPr sz="1000" b="0">
                 <a:solidFill>
                   <a:srgbClr val="5F6F63"/>
                 </a:solidFill>
-                <a:latin typeface="Arial"/>
+                <a:latin typeface="Roboto"/>
               </a:rPr>
               <a:t>Sample Electrical &amp; Air Pty Ltd · What does it cost to win a customer?</a:t>
             </a:r>
@@ -4060,12 +4137,17 @@
           </a:bodyPr>
           <a:lstStyle/>
           <a:p>
+            <a:pPr>
+              <a:defRPr>
+                <a:latin typeface="Roboto"/>
+              </a:defRPr>
+            </a:pPr>
             <a:r>
               <a:rPr sz="2400" b="1">
                 <a:solidFill>
                   <a:srgbClr val="25342A"/>
                 </a:solidFill>
-                <a:latin typeface="Arial"/>
+                <a:latin typeface="Roboto"/>
               </a:rPr>
               <a:t>Headline numbers</a:t>
             </a:r>
@@ -4113,7 +4195,11 @@
           <a:bodyPr rtlCol="0" anchor="ctr"/>
           <a:lstStyle/>
           <a:p>
-            <a:pPr algn="ctr"/>
+            <a:pPr algn="ctr">
+              <a:defRPr>
+                <a:latin typeface="Roboto"/>
+              </a:defRPr>
+            </a:pPr>
           </a:p>
         </p:txBody>
       </p:sp>
@@ -4139,12 +4225,17 @@
           </a:bodyPr>
           <a:lstStyle/>
           <a:p>
+            <a:pPr>
+              <a:defRPr>
+                <a:latin typeface="Roboto"/>
+              </a:defRPr>
+            </a:pPr>
             <a:r>
               <a:rPr sz="1200" b="0">
                 <a:solidFill>
                   <a:srgbClr val="5F6F63"/>
                 </a:solidFill>
-                <a:latin typeface="Arial"/>
+                <a:latin typeface="Roboto"/>
               </a:rPr>
               <a:t>October 2025</a:t>
             </a:r>
@@ -4173,12 +4264,17 @@
           </a:bodyPr>
           <a:lstStyle/>
           <a:p>
+            <a:pPr>
+              <a:defRPr>
+                <a:latin typeface="Roboto"/>
+              </a:defRPr>
+            </a:pPr>
             <a:r>
               <a:rPr sz="3000" b="1">
                 <a:solidFill>
                   <a:srgbClr val="2F7A5D"/>
                 </a:solidFill>
-                <a:latin typeface="Arial"/>
+                <a:latin typeface="Roboto"/>
               </a:rPr>
               <a:t>$261</a:t>
             </a:r>
@@ -4207,12 +4303,17 @@
           </a:bodyPr>
           <a:lstStyle/>
           <a:p>
+            <a:pPr>
+              <a:defRPr>
+                <a:latin typeface="Roboto"/>
+              </a:defRPr>
+            </a:pPr>
             <a:r>
               <a:rPr sz="1100" b="0">
                 <a:solidFill>
                   <a:srgbClr val="5F6F63"/>
                 </a:solidFill>
-                <a:latin typeface="Arial"/>
+                <a:latin typeface="Roboto"/>
               </a:rPr>
               <a:t>September $269</a:t>
             </a:r>
@@ -4260,7 +4361,11 @@
           <a:bodyPr rtlCol="0" anchor="ctr"/>
           <a:lstStyle/>
           <a:p>
-            <a:pPr algn="ctr"/>
+            <a:pPr algn="ctr">
+              <a:defRPr>
+                <a:latin typeface="Roboto"/>
+              </a:defRPr>
+            </a:pPr>
           </a:p>
         </p:txBody>
       </p:sp>
@@ -4286,12 +4391,17 @@
           </a:bodyPr>
           <a:lstStyle/>
           <a:p>
+            <a:pPr>
+              <a:defRPr>
+                <a:latin typeface="Roboto"/>
+              </a:defRPr>
+            </a:pPr>
             <a:r>
               <a:rPr sz="1200" b="0">
                 <a:solidFill>
                   <a:srgbClr val="5F6F63"/>
                 </a:solidFill>
-                <a:latin typeface="Arial"/>
+                <a:latin typeface="Roboto"/>
               </a:rPr>
               <a:t>October last year</a:t>
             </a:r>
@@ -4320,12 +4430,17 @@
           </a:bodyPr>
           <a:lstStyle/>
           <a:p>
+            <a:pPr>
+              <a:defRPr>
+                <a:latin typeface="Roboto"/>
+              </a:defRPr>
+            </a:pPr>
             <a:r>
               <a:rPr sz="3000" b="1">
                 <a:solidFill>
                   <a:srgbClr val="2F7A5D"/>
                 </a:solidFill>
-                <a:latin typeface="Arial"/>
+                <a:latin typeface="Roboto"/>
               </a:rPr>
               <a:t>$253</a:t>
             </a:r>
@@ -4354,12 +4469,17 @@
           </a:bodyPr>
           <a:lstStyle/>
           <a:p>
+            <a:pPr>
+              <a:defRPr>
+                <a:latin typeface="Roboto"/>
+              </a:defRPr>
+            </a:pPr>
             <a:r>
               <a:rPr sz="1100" b="0">
                 <a:solidFill>
                   <a:srgbClr val="5F6F63"/>
                 </a:solidFill>
-                <a:latin typeface="Arial"/>
+                <a:latin typeface="Roboto"/>
               </a:rPr>
               <a:t>34 new customers from $8,600</a:t>
             </a:r>
@@ -4407,7 +4527,11 @@
           <a:bodyPr rtlCol="0" anchor="ctr"/>
           <a:lstStyle/>
           <a:p>
-            <a:pPr algn="ctr"/>
+            <a:pPr algn="ctr">
+              <a:defRPr>
+                <a:latin typeface="Roboto"/>
+              </a:defRPr>
+            </a:pPr>
           </a:p>
         </p:txBody>
       </p:sp>
@@ -4433,12 +4557,17 @@
           </a:bodyPr>
           <a:lstStyle/>
           <a:p>
+            <a:pPr>
+              <a:defRPr>
+                <a:latin typeface="Roboto"/>
+              </a:defRPr>
+            </a:pPr>
             <a:r>
               <a:rPr sz="1200" b="0">
                 <a:solidFill>
                   <a:srgbClr val="5F6F63"/>
                 </a:solidFill>
-                <a:latin typeface="Arial"/>
+                <a:latin typeface="Roboto"/>
               </a:rPr>
               <a:t>Year to date (Jul to Oct 2025)</a:t>
             </a:r>
@@ -4467,12 +4596,17 @@
           </a:bodyPr>
           <a:lstStyle/>
           <a:p>
+            <a:pPr>
+              <a:defRPr>
+                <a:latin typeface="Roboto"/>
+              </a:defRPr>
+            </a:pPr>
             <a:r>
               <a:rPr sz="3000" b="1">
                 <a:solidFill>
                   <a:srgbClr val="2F7A5D"/>
                 </a:solidFill>
-                <a:latin typeface="Arial"/>
+                <a:latin typeface="Roboto"/>
               </a:rPr>
               <a:t>$264</a:t>
             </a:r>
@@ -4501,12 +4635,17 @@
           </a:bodyPr>
           <a:lstStyle/>
           <a:p>
+            <a:pPr>
+              <a:defRPr>
+                <a:latin typeface="Roboto"/>
+              </a:defRPr>
+            </a:pPr>
             <a:r>
               <a:rPr sz="1100" b="0">
                 <a:solidFill>
                   <a:srgbClr val="5F6F63"/>
                 </a:solidFill>
-                <a:latin typeface="Arial"/>
+                <a:latin typeface="Roboto"/>
               </a:rPr>
               <a:t>same period last year: not in the data</a:t>
             </a:r>
@@ -4535,12 +4674,17 @@
           </a:bodyPr>
           <a:lstStyle/>
           <a:p>
+            <a:pPr>
+              <a:defRPr>
+                <a:latin typeface="Roboto"/>
+              </a:defRPr>
+            </a:pPr>
             <a:r>
               <a:rPr sz="900" b="0">
                 <a:solidFill>
                   <a:srgbClr val="5F6F63"/>
                 </a:solidFill>
-                <a:latin typeface="Arial"/>
+                <a:latin typeface="Roboto"/>
               </a:rPr>
               <a:t>cost-to-win.pptx</a:t>
             </a:r>
@@ -4569,13 +4713,17 @@
           </a:bodyPr>
           <a:lstStyle/>
           <a:p>
-            <a:pPr algn="ctr"/>
+            <a:pPr algn="ctr">
+              <a:defRPr>
+                <a:latin typeface="Roboto"/>
+              </a:defRPr>
+            </a:pPr>
             <a:r>
               <a:rPr sz="900" b="0">
                 <a:solidFill>
                   <a:srgbClr val="5F6F63"/>
                 </a:solidFill>
-                <a:latin typeface="Arial"/>
+                <a:latin typeface="Roboto"/>
               </a:rPr>
               <a:t>Data retrieved 2pm, Tue 6 Oct 2026 · Sample data</a:t>
             </a:r>
@@ -4604,13 +4752,17 @@
           </a:bodyPr>
           <a:lstStyle/>
           <a:p>
-            <a:pPr algn="r"/>
+            <a:pPr algn="r">
+              <a:defRPr>
+                <a:latin typeface="Roboto"/>
+              </a:defRPr>
+            </a:pPr>
             <a:r>
               <a:rPr sz="900" b="0">
                 <a:solidFill>
                   <a:srgbClr val="5F6F63"/>
                 </a:solidFill>
-                <a:latin typeface="Arial"/>
+                <a:latin typeface="Roboto"/>
               </a:rPr>
               <a:t>Slide 2 of 5</a:t>
             </a:r>
@@ -4674,7 +4826,11 @@
           <a:bodyPr rtlCol="0" anchor="ctr"/>
           <a:lstStyle/>
           <a:p>
-            <a:pPr algn="ctr"/>
+            <a:pPr algn="ctr">
+              <a:defRPr>
+                <a:latin typeface="Roboto"/>
+              </a:defRPr>
+            </a:pPr>
           </a:p>
         </p:txBody>
       </p:sp>
@@ -4700,12 +4856,17 @@
           </a:bodyPr>
           <a:lstStyle/>
           <a:p>
+            <a:pPr>
+              <a:defRPr>
+                <a:latin typeface="Roboto"/>
+              </a:defRPr>
+            </a:pPr>
             <a:r>
               <a:rPr sz="1000" b="0">
                 <a:solidFill>
                   <a:srgbClr val="5F6F63"/>
                 </a:solidFill>
-                <a:latin typeface="Arial"/>
+                <a:latin typeface="Roboto"/>
               </a:rPr>
               <a:t>Sample Electrical &amp; Air Pty Ltd · What does it cost to win a customer?</a:t>
             </a:r>
@@ -4734,12 +4895,17 @@
           </a:bodyPr>
           <a:lstStyle/>
           <a:p>
+            <a:pPr>
+              <a:defRPr>
+                <a:latin typeface="Roboto"/>
+              </a:defRPr>
+            </a:pPr>
             <a:r>
               <a:rPr sz="2400" b="1">
                 <a:solidFill>
                   <a:srgbClr val="25342A"/>
                 </a:solidFill>
-                <a:latin typeface="Arial"/>
+                <a:latin typeface="Roboto"/>
               </a:rPr>
               <a:t>Cost to win a customer, by month · $ per new customer</a:t>
             </a:r>
@@ -4768,12 +4934,17 @@
           </a:bodyPr>
           <a:lstStyle/>
           <a:p>
+            <a:pPr>
+              <a:defRPr>
+                <a:latin typeface="Roboto"/>
+              </a:defRPr>
+            </a:pPr>
             <a:r>
               <a:rPr sz="1200" b="0">
                 <a:solidFill>
                   <a:srgbClr val="5F6F63"/>
                 </a:solidFill>
-                <a:latin typeface="Arial"/>
+                <a:latin typeface="Roboto"/>
               </a:rPr>
               <a:t>Customers are counted in the month of their first job.</a:t>
             </a:r>
@@ -4820,12 +4991,17 @@
           </a:bodyPr>
           <a:lstStyle/>
           <a:p>
+            <a:pPr>
+              <a:defRPr>
+                <a:latin typeface="Roboto"/>
+              </a:defRPr>
+            </a:pPr>
             <a:r>
               <a:rPr sz="900" b="0">
                 <a:solidFill>
                   <a:srgbClr val="5F6F63"/>
                 </a:solidFill>
-                <a:latin typeface="Arial"/>
+                <a:latin typeface="Roboto"/>
               </a:rPr>
               <a:t>cost-to-win.pptx</a:t>
             </a:r>
@@ -4854,13 +5030,17 @@
           </a:bodyPr>
           <a:lstStyle/>
           <a:p>
-            <a:pPr algn="ctr"/>
+            <a:pPr algn="ctr">
+              <a:defRPr>
+                <a:latin typeface="Roboto"/>
+              </a:defRPr>
+            </a:pPr>
             <a:r>
               <a:rPr sz="900" b="0">
                 <a:solidFill>
                   <a:srgbClr val="5F6F63"/>
                 </a:solidFill>
-                <a:latin typeface="Arial"/>
+                <a:latin typeface="Roboto"/>
               </a:rPr>
               <a:t>Data retrieved 2pm, Tue 6 Oct 2026 · Sample data</a:t>
             </a:r>
@@ -4889,13 +5069,17 @@
           </a:bodyPr>
           <a:lstStyle/>
           <a:p>
-            <a:pPr algn="r"/>
+            <a:pPr algn="r">
+              <a:defRPr>
+                <a:latin typeface="Roboto"/>
+              </a:defRPr>
+            </a:pPr>
             <a:r>
               <a:rPr sz="900" b="0">
                 <a:solidFill>
                   <a:srgbClr val="5F6F63"/>
                 </a:solidFill>
-                <a:latin typeface="Arial"/>
+                <a:latin typeface="Roboto"/>
               </a:rPr>
               <a:t>Slide 3 of 5</a:t>
             </a:r>
@@ -4959,7 +5143,11 @@
           <a:bodyPr rtlCol="0" anchor="ctr"/>
           <a:lstStyle/>
           <a:p>
-            <a:pPr algn="ctr"/>
+            <a:pPr algn="ctr">
+              <a:defRPr>
+                <a:latin typeface="Roboto"/>
+              </a:defRPr>
+            </a:pPr>
           </a:p>
         </p:txBody>
       </p:sp>
@@ -4985,12 +5173,17 @@
           </a:bodyPr>
           <a:lstStyle/>
           <a:p>
+            <a:pPr>
+              <a:defRPr>
+                <a:latin typeface="Roboto"/>
+              </a:defRPr>
+            </a:pPr>
             <a:r>
               <a:rPr sz="1000" b="0">
                 <a:solidFill>
                   <a:srgbClr val="5F6F63"/>
                 </a:solidFill>
-                <a:latin typeface="Arial"/>
+                <a:latin typeface="Roboto"/>
               </a:rPr>
               <a:t>Sample Electrical &amp; Air Pty Ltd · What does it cost to win a customer?</a:t>
             </a:r>
@@ -5019,12 +5212,17 @@
           </a:bodyPr>
           <a:lstStyle/>
           <a:p>
+            <a:pPr>
+              <a:defRPr>
+                <a:latin typeface="Roboto"/>
+              </a:defRPr>
+            </a:pPr>
             <a:r>
               <a:rPr sz="2400" b="1">
                 <a:solidFill>
                   <a:srgbClr val="25342A"/>
                 </a:solidFill>
-                <a:latin typeface="Arial"/>
+                <a:latin typeface="Roboto"/>
               </a:rPr>
               <a:t>Cost to win a customer, by month · New customers</a:t>
             </a:r>
@@ -5053,12 +5251,17 @@
           </a:bodyPr>
           <a:lstStyle/>
           <a:p>
+            <a:pPr>
+              <a:defRPr>
+                <a:latin typeface="Roboto"/>
+              </a:defRPr>
+            </a:pPr>
             <a:r>
               <a:rPr sz="1200" b="0">
                 <a:solidFill>
                   <a:srgbClr val="5F6F63"/>
                 </a:solidFill>
-                <a:latin typeface="Arial"/>
+                <a:latin typeface="Roboto"/>
               </a:rPr>
               <a:t>Customers are counted in the month of their first job.</a:t>
             </a:r>
@@ -5105,12 +5308,17 @@
           </a:bodyPr>
           <a:lstStyle/>
           <a:p>
+            <a:pPr>
+              <a:defRPr>
+                <a:latin typeface="Roboto"/>
+              </a:defRPr>
+            </a:pPr>
             <a:r>
               <a:rPr sz="900" b="0">
                 <a:solidFill>
                   <a:srgbClr val="5F6F63"/>
                 </a:solidFill>
-                <a:latin typeface="Arial"/>
+                <a:latin typeface="Roboto"/>
               </a:rPr>
               <a:t>cost-to-win.pptx</a:t>
             </a:r>
@@ -5139,13 +5347,17 @@
           </a:bodyPr>
           <a:lstStyle/>
           <a:p>
-            <a:pPr algn="ctr"/>
+            <a:pPr algn="ctr">
+              <a:defRPr>
+                <a:latin typeface="Roboto"/>
+              </a:defRPr>
+            </a:pPr>
             <a:r>
               <a:rPr sz="900" b="0">
                 <a:solidFill>
                   <a:srgbClr val="5F6F63"/>
                 </a:solidFill>
-                <a:latin typeface="Arial"/>
+                <a:latin typeface="Roboto"/>
               </a:rPr>
               <a:t>Data retrieved 2pm, Tue 6 Oct 2026 · Sample data</a:t>
             </a:r>
@@ -5174,13 +5386,17 @@
           </a:bodyPr>
           <a:lstStyle/>
           <a:p>
-            <a:pPr algn="r"/>
+            <a:pPr algn="r">
+              <a:defRPr>
+                <a:latin typeface="Roboto"/>
+              </a:defRPr>
+            </a:pPr>
             <a:r>
               <a:rPr sz="900" b="0">
                 <a:solidFill>
                   <a:srgbClr val="5F6F63"/>
                 </a:solidFill>
-                <a:latin typeface="Arial"/>
+                <a:latin typeface="Roboto"/>
               </a:rPr>
               <a:t>Slide 4 of 5</a:t>
             </a:r>
@@ -5244,7 +5460,11 @@
           <a:bodyPr rtlCol="0" anchor="ctr"/>
           <a:lstStyle/>
           <a:p>
-            <a:pPr algn="ctr"/>
+            <a:pPr algn="ctr">
+              <a:defRPr>
+                <a:latin typeface="Roboto"/>
+              </a:defRPr>
+            </a:pPr>
           </a:p>
         </p:txBody>
       </p:sp>
@@ -5270,12 +5490,17 @@
           </a:bodyPr>
           <a:lstStyle/>
           <a:p>
+            <a:pPr>
+              <a:defRPr>
+                <a:latin typeface="Roboto"/>
+              </a:defRPr>
+            </a:pPr>
             <a:r>
               <a:rPr sz="1000" b="0">
                 <a:solidFill>
                   <a:srgbClr val="5F6F63"/>
                 </a:solidFill>
-                <a:latin typeface="Arial"/>
+                <a:latin typeface="Roboto"/>
               </a:rPr>
               <a:t>Sample Electrical &amp; Air Pty Ltd · What does it cost to win a customer?</a:t>
             </a:r>
@@ -5304,12 +5529,17 @@
           </a:bodyPr>
           <a:lstStyle/>
           <a:p>
+            <a:pPr>
+              <a:defRPr>
+                <a:latin typeface="Roboto"/>
+              </a:defRPr>
+            </a:pPr>
             <a:r>
               <a:rPr sz="2400" b="1">
                 <a:solidFill>
                   <a:srgbClr val="25342A"/>
                 </a:solidFill>
-                <a:latin typeface="Arial"/>
+                <a:latin typeface="Roboto"/>
               </a:rPr>
               <a:t>What it shows</a:t>
             </a:r>
@@ -5357,7 +5587,11 @@
           <a:bodyPr rtlCol="0" anchor="ctr"/>
           <a:lstStyle/>
           <a:p>
-            <a:pPr algn="ctr"/>
+            <a:pPr algn="ctr">
+              <a:defRPr>
+                <a:latin typeface="Roboto"/>
+              </a:defRPr>
+            </a:pPr>
           </a:p>
         </p:txBody>
       </p:sp>
@@ -5383,12 +5617,17 @@
           </a:bodyPr>
           <a:lstStyle/>
           <a:p>
+            <a:pPr>
+              <a:defRPr>
+                <a:latin typeface="Roboto"/>
+              </a:defRPr>
+            </a:pPr>
             <a:r>
               <a:rPr sz="1100" b="1">
                 <a:solidFill>
                   <a:srgbClr val="5F6F63"/>
                 </a:solidFill>
-                <a:latin typeface="Arial"/>
+                <a:latin typeface="Roboto"/>
               </a:rPr>
               <a:t>WHAT IT SHOWS</a:t>
             </a:r>
@@ -5417,12 +5656,17 @@
           </a:bodyPr>
           <a:lstStyle/>
           <a:p>
+            <a:pPr>
+              <a:defRPr>
+                <a:latin typeface="Roboto"/>
+              </a:defRPr>
+            </a:pPr>
             <a:r>
               <a:rPr sz="1600" b="0">
                 <a:solidFill>
                   <a:srgbClr val="25342A"/>
                 </a:solidFill>
-                <a:latin typeface="Arial"/>
+                <a:latin typeface="Roboto"/>
               </a:rPr>
               <a:t>33 new customers came from $8,600 of marketing in October, against 32 from $8,600 in September: $261 each, down from $269.</a:t>
             </a:r>
@@ -5470,7 +5714,11 @@
           <a:bodyPr rtlCol="0" anchor="ctr"/>
           <a:lstStyle/>
           <a:p>
-            <a:pPr algn="ctr"/>
+            <a:pPr algn="ctr">
+              <a:defRPr>
+                <a:latin typeface="Roboto"/>
+              </a:defRPr>
+            </a:pPr>
           </a:p>
         </p:txBody>
       </p:sp>
@@ -5496,12 +5744,17 @@
           </a:bodyPr>
           <a:lstStyle/>
           <a:p>
+            <a:pPr>
+              <a:defRPr>
+                <a:latin typeface="Roboto"/>
+              </a:defRPr>
+            </a:pPr>
             <a:r>
               <a:rPr sz="1100" b="1">
                 <a:solidFill>
                   <a:srgbClr val="5F6F63"/>
                 </a:solidFill>
-                <a:latin typeface="Arial"/>
+                <a:latin typeface="Roboto"/>
               </a:rPr>
               <a:t>WHAT YOU'D DO ABOUT IT</a:t>
             </a:r>
@@ -5530,12 +5783,17 @@
           </a:bodyPr>
           <a:lstStyle/>
           <a:p>
+            <a:pPr>
+              <a:defRPr>
+                <a:latin typeface="Roboto"/>
+              </a:defRPr>
+            </a:pPr>
             <a:r>
               <a:rPr sz="1600" b="0">
                 <a:solidFill>
                   <a:srgbClr val="25342A"/>
                 </a:solidFill>
-                <a:latin typeface="Arial"/>
+                <a:latin typeface="Roboto"/>
               </a:rPr>
               <a:t>A lower cost per customer with steady spend usually means the marketing mix is working. Recording where each new customer came from shows the cost per channel.</a:t>
             </a:r>
@@ -5564,12 +5822,17 @@
           </a:bodyPr>
           <a:lstStyle/>
           <a:p>
+            <a:pPr>
+              <a:defRPr>
+                <a:latin typeface="Roboto"/>
+              </a:defRPr>
+            </a:pPr>
             <a:r>
               <a:rPr sz="900" b="0">
                 <a:solidFill>
                   <a:srgbClr val="5F6F63"/>
                 </a:solidFill>
-                <a:latin typeface="Arial"/>
+                <a:latin typeface="Roboto"/>
               </a:rPr>
               <a:t>cost-to-win.pptx</a:t>
             </a:r>
@@ -5598,13 +5861,17 @@
           </a:bodyPr>
           <a:lstStyle/>
           <a:p>
-            <a:pPr algn="ctr"/>
+            <a:pPr algn="ctr">
+              <a:defRPr>
+                <a:latin typeface="Roboto"/>
+              </a:defRPr>
+            </a:pPr>
             <a:r>
               <a:rPr sz="900" b="0">
                 <a:solidFill>
                   <a:srgbClr val="5F6F63"/>
                 </a:solidFill>
-                <a:latin typeface="Arial"/>
+                <a:latin typeface="Roboto"/>
               </a:rPr>
               <a:t>Data retrieved 2pm, Tue 6 Oct 2026 · Sample data</a:t>
             </a:r>
@@ -5633,13 +5900,17 @@
           </a:bodyPr>
           <a:lstStyle/>
           <a:p>
-            <a:pPr algn="r"/>
+            <a:pPr algn="r">
+              <a:defRPr>
+                <a:latin typeface="Roboto"/>
+              </a:defRPr>
+            </a:pPr>
             <a:r>
               <a:rPr sz="900" b="0">
                 <a:solidFill>
                   <a:srgbClr val="5F6F63"/>
                 </a:solidFill>
-                <a:latin typeface="Arial"/>
+                <a:latin typeface="Roboto"/>
               </a:rPr>
               <a:t>Slide 5 of 5</a:t>
             </a:r>

--- a/media/exports/reports/2025-10/cost-to-win.pptx
+++ b/media/exports/reports/2025-10/cost-to-win.pptx
@@ -6,10 +6,7 @@
   </p:sldMasterIdLst>
   <p:sldIdLst>
     <p:sldId id="256" r:id="rId7"/>
-    <p:sldId id="257" r:id="rId8"/>
-    <p:sldId id="258" r:id="rId9"/>
-    <p:sldId id="259" r:id="rId10"/>
-    <p:sldId id="260" r:id="rId11"/>
+    <p:sldId id="257" r:id="rId9"/>
   </p:sldIdLst>
   <p:sldSz cx="12191695" cy="6858000" type="screen4x3"/>
   <p:notesSz cx="6858000" cy="9144000"/>
@@ -116,9 +113,19 @@
   <c:date1904 val="0"/>
   <c:roundedCorners val="0"/>
   <c:chart>
-    <c:autoTitleDeleted val="0"/>
+    <c:autoTitleDeleted val="1"/>
     <c:plotArea>
-      <c:layout/>
+      <c:layout>
+        <c:manualLayout>
+          <c:layoutTarget val="inner"/>
+          <c:xMode val="edge"/>
+          <c:yMode val="edge"/>
+          <c:x val="0.11"/>
+          <c:y val="0.05"/>
+          <c:w val="0.86"/>
+          <c:h val="0.8"/>
+        </c:manualLayout>
+      </c:layout>
       <c:areaChart>
         <c:grouping val="standard"/>
         <c:varyColors val="0"/>
@@ -131,7 +138,7 @@
               <c:strCache>
                 <c:ptCount val="1"/>
                 <c:pt idx="0">
-                  <c:v>Value</c:v>
+                  <c:v>$ per new customer</c:v>
                 </c:pt>
               </c:strCache>
             </c:strRef>
@@ -280,12 +287,15 @@
         <c:auto val="1"/>
         <c:lblAlgn val="ctr"/>
         <c:lblOffset val="100"/>
+        <c:tickLblSkip val="2"/>
         <c:noMultiLvlLbl val="0"/>
       </c:catAx>
       <c:valAx>
         <c:axId val="-2100718248"/>
         <c:scaling>
           <c:orientation val="minMax"/>
+          <c:max val="400.0"/>
+          <c:min val="0.0"/>
         </c:scaling>
         <c:delete val="0"/>
         <c:axPos val="l"/>
@@ -319,6 +329,7 @@
         <c:crossAx val="-2101159928"/>
         <c:crosses val="autoZero"/>
         <c:crossBetween val="midCat"/>
+        <c:majorUnit val="100.0"/>
       </c:valAx>
     </c:plotArea>
     <c:plotVisOnly val="1"/>
@@ -343,236 +354,494 @@
 </c:chartSpace>
 </file>
 
-<file path=ppt/charts/chart2.xml><?xml version="1.0" encoding="utf-8"?>
-<c:chartSpace xmlns:c="http://schemas.openxmlformats.org/drawingml/2006/chart" xmlns:a="http://schemas.openxmlformats.org/drawingml/2006/main" xmlns:r="http://schemas.openxmlformats.org/officeDocument/2006/relationships">
-  <c:date1904 val="0"/>
-  <c:roundedCorners val="0"/>
-  <c:chart>
-    <c:autoTitleDeleted val="0"/>
-    <c:plotArea>
-      <c:layout/>
-      <c:areaChart>
-        <c:grouping val="standard"/>
-        <c:varyColors val="0"/>
-        <c:ser>
-          <c:idx val="0"/>
-          <c:order val="0"/>
-          <c:tx>
-            <c:strRef>
-              <c:f>Sheet1!$B$1</c:f>
-              <c:strCache>
-                <c:ptCount val="1"/>
-                <c:pt idx="0">
-                  <c:v>Value</c:v>
-                </c:pt>
-              </c:strCache>
-            </c:strRef>
-          </c:tx>
-          <c:spPr>
+<file path=ppt/notesMasters/notesMaster1.xml><?xml version="1.0" encoding="utf-8"?>
+<p:notesMaster xmlns:a="http://schemas.openxmlformats.org/drawingml/2006/main" xmlns:p="http://schemas.openxmlformats.org/presentationml/2006/main" xmlns:r="http://schemas.openxmlformats.org/officeDocument/2006/relationships">
+  <p:cSld>
+    <p:bg>
+      <p:bgRef idx="1001">
+        <a:schemeClr val="bg1"/>
+      </p:bgRef>
+    </p:bg>
+    <p:spTree>
+      <p:nvGrpSpPr>
+        <p:cNvPr id="1" name=""/>
+        <p:cNvGrpSpPr/>
+        <p:nvPr/>
+      </p:nvGrpSpPr>
+      <p:grpSpPr>
+        <a:xfrm>
+          <a:off x="0" y="0"/>
+          <a:ext cx="0" cy="0"/>
+          <a:chOff x="0" y="0"/>
+          <a:chExt cx="0" cy="0"/>
+        </a:xfrm>
+      </p:grpSpPr>
+      <p:sp>
+        <p:nvSpPr>
+          <p:cNvPr id="2" name="Header Placeholder 1"/>
+          <p:cNvSpPr>
+            <a:spLocks noGrp="1"/>
+          </p:cNvSpPr>
+          <p:nvPr>
+            <p:ph type="hdr" sz="quarter"/>
+          </p:nvPr>
+        </p:nvSpPr>
+        <p:spPr>
+          <a:xfrm>
+            <a:off x="0" y="0"/>
+            <a:ext cx="2971800" cy="457200"/>
+          </a:xfrm>
+          <a:prstGeom prst="rect">
+            <a:avLst/>
+          </a:prstGeom>
+        </p:spPr>
+        <p:txBody>
+          <a:bodyPr vert="horz" lIns="91440" tIns="45720" rIns="91440" bIns="45720" rtlCol="0"/>
+          <a:lstStyle>
+            <a:lvl1pPr algn="l">
+              <a:defRPr sz="1200"/>
+            </a:lvl1pPr>
+          </a:lstStyle>
+          <a:p>
+            <a:endParaRPr lang="en-US"/>
+          </a:p>
+        </p:txBody>
+      </p:sp>
+      <p:sp>
+        <p:nvSpPr>
+          <p:cNvPr id="3" name="Date Placeholder 2"/>
+          <p:cNvSpPr>
+            <a:spLocks noGrp="1"/>
+          </p:cNvSpPr>
+          <p:nvPr>
+            <p:ph type="dt" idx="1"/>
+          </p:nvPr>
+        </p:nvSpPr>
+        <p:spPr>
+          <a:xfrm>
+            <a:off x="3884613" y="0"/>
+            <a:ext cx="2971800" cy="457200"/>
+          </a:xfrm>
+          <a:prstGeom prst="rect">
+            <a:avLst/>
+          </a:prstGeom>
+        </p:spPr>
+        <p:txBody>
+          <a:bodyPr vert="horz" lIns="91440" tIns="45720" rIns="91440" bIns="45720" rtlCol="0"/>
+          <a:lstStyle>
+            <a:lvl1pPr algn="r">
+              <a:defRPr sz="1200"/>
+            </a:lvl1pPr>
+          </a:lstStyle>
+          <a:p>
+            <a:fld id="{0F89C1C7-3DCD-1040-A9CF-14679D8B5DDD}" type="datetimeFigureOut">
+              <a:rPr lang="en-US" smtClean="0"/>
+              <a:t>10/17/16</a:t>
+            </a:fld>
+            <a:endParaRPr lang="en-US"/>
+          </a:p>
+        </p:txBody>
+      </p:sp>
+      <p:sp>
+        <p:nvSpPr>
+          <p:cNvPr id="4" name="Slide Image Placeholder 3"/>
+          <p:cNvSpPr>
+            <a:spLocks noGrp="1" noRot="1" noChangeAspect="1"/>
+          </p:cNvSpPr>
+          <p:nvPr>
+            <p:ph type="sldImg" idx="2"/>
+          </p:nvPr>
+        </p:nvSpPr>
+        <p:spPr>
+          <a:xfrm>
+            <a:off x="1143000" y="685800"/>
+            <a:ext cx="4572000" cy="3429000"/>
+          </a:xfrm>
+          <a:prstGeom prst="rect">
+            <a:avLst/>
+          </a:prstGeom>
+          <a:noFill/>
+          <a:ln w="12700">
             <a:solidFill>
-              <a:srgbClr val="0E9F6E">
-                <a:alpha val="25000"/>
-              </a:srgbClr>
+              <a:prstClr val="black"/>
             </a:solidFill>
-            <a:ln w="31750">
-              <a:solidFill>
-                <a:srgbClr val="0E9F6E"/>
-              </a:solidFill>
-            </a:ln>
-          </c:spPr>
-          <c:cat>
-            <c:strRef>
-              <c:f>Sheet1!$A$2:$A$14</c:f>
-              <c:strCache>
-                <c:ptCount val="13"/>
-                <c:pt idx="0">
-                  <c:v>Oct 24</c:v>
-                </c:pt>
-                <c:pt idx="1">
-                  <c:v>Nov 24</c:v>
-                </c:pt>
-                <c:pt idx="2">
-                  <c:v>Dec 24</c:v>
-                </c:pt>
-                <c:pt idx="3">
-                  <c:v>Jan 25</c:v>
-                </c:pt>
-                <c:pt idx="4">
-                  <c:v>Feb 25</c:v>
-                </c:pt>
-                <c:pt idx="5">
-                  <c:v>Mar 25</c:v>
-                </c:pt>
-                <c:pt idx="6">
-                  <c:v>Apr 25</c:v>
-                </c:pt>
-                <c:pt idx="7">
-                  <c:v>May 25</c:v>
-                </c:pt>
-                <c:pt idx="8">
-                  <c:v>Jun 25</c:v>
-                </c:pt>
-                <c:pt idx="9">
-                  <c:v>Jul 25</c:v>
-                </c:pt>
-                <c:pt idx="10">
-                  <c:v>Aug 25</c:v>
-                </c:pt>
-                <c:pt idx="11">
-                  <c:v>Sep 25</c:v>
-                </c:pt>
-                <c:pt idx="12">
-                  <c:v>Oct 25</c:v>
-                </c:pt>
-              </c:strCache>
-            </c:strRef>
-          </c:cat>
-          <c:val>
-            <c:numRef>
-              <c:f>Sheet1!$B$2:$B$14</c:f>
-              <c:numCache>
-                <c:formatCode>#,##0;[Red](#,##0)</c:formatCode>
-                <c:ptCount val="13"/>
-                <c:pt idx="0">
-                  <c:v>34</c:v>
-                </c:pt>
-                <c:pt idx="1">
-                  <c:v>33</c:v>
-                </c:pt>
-                <c:pt idx="2">
-                  <c:v>37</c:v>
-                </c:pt>
-                <c:pt idx="3">
-                  <c:v>40</c:v>
-                </c:pt>
-                <c:pt idx="4">
-                  <c:v>35</c:v>
-                </c:pt>
-                <c:pt idx="5">
-                  <c:v>34</c:v>
-                </c:pt>
-                <c:pt idx="6">
-                  <c:v>30</c:v>
-                </c:pt>
-                <c:pt idx="7">
-                  <c:v>31</c:v>
-                </c:pt>
-                <c:pt idx="8">
-                  <c:v>32</c:v>
-                </c:pt>
-                <c:pt idx="9">
-                  <c:v>28</c:v>
-                </c:pt>
-                <c:pt idx="10">
-                  <c:v>36</c:v>
-                </c:pt>
-                <c:pt idx="11">
-                  <c:v>32</c:v>
-                </c:pt>
-                <c:pt idx="12">
-                  <c:v>33</c:v>
-                </c:pt>
-              </c:numCache>
-            </c:numRef>
-          </c:val>
-        </c:ser>
-        <c:dLbls>
-          <c:showLegendKey val="0"/>
-          <c:showVal val="0"/>
-          <c:showCatName val="0"/>
-          <c:showSerName val="0"/>
-          <c:showPercent val="0"/>
-          <c:showBubbleSize val="0"/>
-        </c:dLbls>
-        <c:axId val="-2101159928"/>
-        <c:axId val="-2100718248"/>
-      </c:areaChart>
-      <c:catAx>
-        <c:axId val="-2101159928"/>
-        <c:scaling>
-          <c:orientation val="minMax"/>
-        </c:scaling>
-        <c:delete val="0"/>
-        <c:axPos val="b"/>
-        <c:numFmt formatCode="General" sourceLinked="1"/>
-        <c:majorTickMark val="out"/>
-        <c:minorTickMark val="none"/>
-        <c:tickLblPos val="nextTo"/>
-        <c:txPr>
+          </a:ln>
+        </p:spPr>
+        <p:txBody>
+          <a:bodyPr vert="horz" lIns="91440" tIns="45720" rIns="91440" bIns="45720" rtlCol="0" anchor="ctr"/>
+          <a:lstStyle/>
+          <a:p>
+            <a:endParaRPr lang="en-US"/>
+          </a:p>
+        </p:txBody>
+      </p:sp>
+      <p:sp>
+        <p:nvSpPr>
+          <p:cNvPr id="5" name="Notes Placeholder 4"/>
+          <p:cNvSpPr>
+            <a:spLocks noGrp="1"/>
+          </p:cNvSpPr>
+          <p:nvPr>
+            <p:ph type="body" sz="quarter" idx="3"/>
+          </p:nvPr>
+        </p:nvSpPr>
+        <p:spPr>
+          <a:xfrm>
+            <a:off x="685800" y="4343400"/>
+            <a:ext cx="5486400" cy="4114800"/>
+          </a:xfrm>
+          <a:prstGeom prst="rect">
+            <a:avLst/>
+          </a:prstGeom>
+        </p:spPr>
+        <p:txBody>
+          <a:bodyPr vert="horz" lIns="91440" tIns="45720" rIns="91440" bIns="45720" rtlCol="0"/>
+          <a:lstStyle/>
+          <a:p>
+            <a:pPr lvl="0"/>
+            <a:r>
+              <a:rPr lang="en-US" smtClean="0"/>
+              <a:t>Click to edit Master text styles</a:t>
+            </a:r>
+          </a:p>
+          <a:p>
+            <a:pPr lvl="1"/>
+            <a:r>
+              <a:rPr lang="en-US" smtClean="0"/>
+              <a:t>Second level</a:t>
+            </a:r>
+          </a:p>
+          <a:p>
+            <a:pPr lvl="2"/>
+            <a:r>
+              <a:rPr lang="en-US" smtClean="0"/>
+              <a:t>Third level</a:t>
+            </a:r>
+          </a:p>
+          <a:p>
+            <a:pPr lvl="3"/>
+            <a:r>
+              <a:rPr lang="en-US" smtClean="0"/>
+              <a:t>Fourth level</a:t>
+            </a:r>
+          </a:p>
+          <a:p>
+            <a:pPr lvl="4"/>
+            <a:r>
+              <a:rPr lang="en-US" smtClean="0"/>
+              <a:t>Fifth level</a:t>
+            </a:r>
+            <a:endParaRPr lang="en-US"/>
+          </a:p>
+        </p:txBody>
+      </p:sp>
+      <p:sp>
+        <p:nvSpPr>
+          <p:cNvPr id="6" name="Footer Placeholder 5"/>
+          <p:cNvSpPr>
+            <a:spLocks noGrp="1"/>
+          </p:cNvSpPr>
+          <p:nvPr>
+            <p:ph type="ftr" sz="quarter" idx="4"/>
+          </p:nvPr>
+        </p:nvSpPr>
+        <p:spPr>
+          <a:xfrm>
+            <a:off x="0" y="8685213"/>
+            <a:ext cx="2971800" cy="457200"/>
+          </a:xfrm>
+          <a:prstGeom prst="rect">
+            <a:avLst/>
+          </a:prstGeom>
+        </p:spPr>
+        <p:txBody>
+          <a:bodyPr vert="horz" lIns="91440" tIns="45720" rIns="91440" bIns="45720" rtlCol="0" anchor="b"/>
+          <a:lstStyle>
+            <a:lvl1pPr algn="l">
+              <a:defRPr sz="1200"/>
+            </a:lvl1pPr>
+          </a:lstStyle>
+          <a:p>
+            <a:endParaRPr lang="en-US"/>
+          </a:p>
+        </p:txBody>
+      </p:sp>
+      <p:sp>
+        <p:nvSpPr>
+          <p:cNvPr id="7" name="Slide Number Placeholder 6"/>
+          <p:cNvSpPr>
+            <a:spLocks noGrp="1"/>
+          </p:cNvSpPr>
+          <p:nvPr>
+            <p:ph type="sldNum" sz="quarter" idx="5"/>
+          </p:nvPr>
+        </p:nvSpPr>
+        <p:spPr>
+          <a:xfrm>
+            <a:off x="3884613" y="8685213"/>
+            <a:ext cx="2971800" cy="457200"/>
+          </a:xfrm>
+          <a:prstGeom prst="rect">
+            <a:avLst/>
+          </a:prstGeom>
+        </p:spPr>
+        <p:txBody>
+          <a:bodyPr vert="horz" lIns="91440" tIns="45720" rIns="91440" bIns="45720" rtlCol="0" anchor="b"/>
+          <a:lstStyle>
+            <a:lvl1pPr algn="r">
+              <a:defRPr sz="1200"/>
+            </a:lvl1pPr>
+          </a:lstStyle>
+          <a:p>
+            <a:fld id="{BB5E49A5-4136-284D-997B-48E1D791AD67}" type="slidenum">
+              <a:rPr lang="en-US" smtClean="0"/>
+              <a:t>‹#›</a:t>
+            </a:fld>
+            <a:endParaRPr lang="en-US"/>
+          </a:p>
+        </p:txBody>
+      </p:sp>
+    </p:spTree>
+    <p:extLst>
+      <p:ext uri="{BB962C8B-B14F-4D97-AF65-F5344CB8AC3E}">
+        <p14:creationId xmlns:p14="http://schemas.microsoft.com/office/powerpoint/2010/main" val="2623252185"/>
+      </p:ext>
+    </p:extLst>
+  </p:cSld>
+  <p:clrMap bg1="lt1" tx1="dk1" bg2="lt2" tx2="dk2" accent1="accent1" accent2="accent2" accent3="accent3" accent4="accent4" accent5="accent5" accent6="accent6" hlink="hlink" folHlink="folHlink"/>
+  <p:notesStyle>
+    <a:lvl1pPr marL="0" algn="l" defTabSz="457200" rtl="0" eaLnBrk="1" latinLnBrk="0" hangingPunct="1">
+      <a:defRPr sz="1200" kern="1200">
+        <a:solidFill>
+          <a:schemeClr val="tx1"/>
+        </a:solidFill>
+        <a:latin typeface="+mn-lt"/>
+        <a:ea typeface="+mn-ea"/>
+        <a:cs typeface="+mn-cs"/>
+      </a:defRPr>
+    </a:lvl1pPr>
+    <a:lvl2pPr marL="457200" algn="l" defTabSz="457200" rtl="0" eaLnBrk="1" latinLnBrk="0" hangingPunct="1">
+      <a:defRPr sz="1200" kern="1200">
+        <a:solidFill>
+          <a:schemeClr val="tx1"/>
+        </a:solidFill>
+        <a:latin typeface="+mn-lt"/>
+        <a:ea typeface="+mn-ea"/>
+        <a:cs typeface="+mn-cs"/>
+      </a:defRPr>
+    </a:lvl2pPr>
+    <a:lvl3pPr marL="914400" algn="l" defTabSz="457200" rtl="0" eaLnBrk="1" latinLnBrk="0" hangingPunct="1">
+      <a:defRPr sz="1200" kern="1200">
+        <a:solidFill>
+          <a:schemeClr val="tx1"/>
+        </a:solidFill>
+        <a:latin typeface="+mn-lt"/>
+        <a:ea typeface="+mn-ea"/>
+        <a:cs typeface="+mn-cs"/>
+      </a:defRPr>
+    </a:lvl3pPr>
+    <a:lvl4pPr marL="1371600" algn="l" defTabSz="457200" rtl="0" eaLnBrk="1" latinLnBrk="0" hangingPunct="1">
+      <a:defRPr sz="1200" kern="1200">
+        <a:solidFill>
+          <a:schemeClr val="tx1"/>
+        </a:solidFill>
+        <a:latin typeface="+mn-lt"/>
+        <a:ea typeface="+mn-ea"/>
+        <a:cs typeface="+mn-cs"/>
+      </a:defRPr>
+    </a:lvl4pPr>
+    <a:lvl5pPr marL="1828800" algn="l" defTabSz="457200" rtl="0" eaLnBrk="1" latinLnBrk="0" hangingPunct="1">
+      <a:defRPr sz="1200" kern="1200">
+        <a:solidFill>
+          <a:schemeClr val="tx1"/>
+        </a:solidFill>
+        <a:latin typeface="+mn-lt"/>
+        <a:ea typeface="+mn-ea"/>
+        <a:cs typeface="+mn-cs"/>
+      </a:defRPr>
+    </a:lvl5pPr>
+    <a:lvl6pPr marL="2286000" algn="l" defTabSz="457200" rtl="0" eaLnBrk="1" latinLnBrk="0" hangingPunct="1">
+      <a:defRPr sz="1200" kern="1200">
+        <a:solidFill>
+          <a:schemeClr val="tx1"/>
+        </a:solidFill>
+        <a:latin typeface="+mn-lt"/>
+        <a:ea typeface="+mn-ea"/>
+        <a:cs typeface="+mn-cs"/>
+      </a:defRPr>
+    </a:lvl6pPr>
+    <a:lvl7pPr marL="2743200" algn="l" defTabSz="457200" rtl="0" eaLnBrk="1" latinLnBrk="0" hangingPunct="1">
+      <a:defRPr sz="1200" kern="1200">
+        <a:solidFill>
+          <a:schemeClr val="tx1"/>
+        </a:solidFill>
+        <a:latin typeface="+mn-lt"/>
+        <a:ea typeface="+mn-ea"/>
+        <a:cs typeface="+mn-cs"/>
+      </a:defRPr>
+    </a:lvl7pPr>
+    <a:lvl8pPr marL="3200400" algn="l" defTabSz="457200" rtl="0" eaLnBrk="1" latinLnBrk="0" hangingPunct="1">
+      <a:defRPr sz="1200" kern="1200">
+        <a:solidFill>
+          <a:schemeClr val="tx1"/>
+        </a:solidFill>
+        <a:latin typeface="+mn-lt"/>
+        <a:ea typeface="+mn-ea"/>
+        <a:cs typeface="+mn-cs"/>
+      </a:defRPr>
+    </a:lvl8pPr>
+    <a:lvl9pPr marL="3657600" algn="l" defTabSz="457200" rtl="0" eaLnBrk="1" latinLnBrk="0" hangingPunct="1">
+      <a:defRPr sz="1200" kern="1200">
+        <a:solidFill>
+          <a:schemeClr val="tx1"/>
+        </a:solidFill>
+        <a:latin typeface="+mn-lt"/>
+        <a:ea typeface="+mn-ea"/>
+        <a:cs typeface="+mn-cs"/>
+      </a:defRPr>
+    </a:lvl9pPr>
+  </p:notesStyle>
+</p:notesMaster>
+</file>
+
+<file path=ppt/notesSlides/notesSlide1.xml><?xml version="1.0" encoding="utf-8"?>
+<p:notes xmlns:a="http://schemas.openxmlformats.org/drawingml/2006/main" xmlns:p="http://schemas.openxmlformats.org/presentationml/2006/main" xmlns:r="http://schemas.openxmlformats.org/officeDocument/2006/relationships">
+  <p:cSld>
+    <p:spTree>
+      <p:nvGrpSpPr>
+        <p:cNvPr id="1" name=""/>
+        <p:cNvGrpSpPr/>
+        <p:nvPr/>
+      </p:nvGrpSpPr>
+      <p:grpSpPr>
+        <a:xfrm>
+          <a:off x="0" y="0"/>
+          <a:ext cx="0" cy="0"/>
+          <a:chOff x="0" y="0"/>
+          <a:chExt cx="0" cy="0"/>
+        </a:xfrm>
+      </p:grpSpPr>
+      <p:sp>
+        <p:nvSpPr>
+          <p:cNvPr id="2" name="Slide Image Placeholder 1"/>
+          <p:cNvSpPr>
+            <a:spLocks noGrp="1"/>
+          </p:cNvSpPr>
+          <p:nvPr>
+            <p:ph type="sldImg" idx="2"/>
+          </p:nvPr>
+        </p:nvSpPr>
+        <p:spPr/>
+      </p:sp>
+      <p:sp>
+        <p:nvSpPr>
+          <p:cNvPr id="3" name="Notes Placeholder 2"/>
+          <p:cNvSpPr>
+            <a:spLocks noGrp="1"/>
+          </p:cNvSpPr>
+          <p:nvPr>
+            <p:ph type="body" idx="3" sz="quarter"/>
+          </p:nvPr>
+        </p:nvSpPr>
+        <p:spPr/>
+        <p:txBody>
           <a:bodyPr/>
           <a:lstStyle/>
           <a:p>
-            <a:pPr>
-              <a:defRPr sz="1000"/>
-            </a:pPr>
-          </a:p>
-        </c:txPr>
-        <c:crossAx val="-2100718248"/>
-        <c:crosses val="autoZero"/>
-        <c:auto val="1"/>
-        <c:lblAlgn val="ctr"/>
-        <c:lblOffset val="100"/>
-        <c:noMultiLvlLbl val="0"/>
-      </c:catAx>
-      <c:valAx>
-        <c:axId val="-2100718248"/>
-        <c:scaling>
-          <c:orientation val="minMax"/>
-        </c:scaling>
-        <c:delete val="0"/>
-        <c:axPos val="l"/>
-        <c:majorGridlines>
-          <c:spPr>
-            <a:ln>
-              <a:solidFill>
-                <a:srgbClr val="E6EAE7"/>
-              </a:solidFill>
-            </a:ln>
-          </c:spPr>
-        </c:majorGridlines>
-        <c:numFmt formatCode="#,##0;[Red](#,##0)" sourceLinked="0"/>
-        <c:majorTickMark val="out"/>
-        <c:minorTickMark val="none"/>
-        <c:tickLblPos val="nextTo"/>
-        <c:spPr>
-          <a:ln>
-            <a:noFill/>
-          </a:ln>
-        </c:spPr>
-        <c:txPr>
+            <a:r>
+              <a:t>What does it cost to win a customer?. Sample Electrical &amp; Air Pty Ltd. Period: October 2025. Marketing spend divided by the customers it actually brought in (a customer's first ever job), month by month.</a:t>
+            </a:r>
+          </a:p>
+        </p:txBody>
+      </p:sp>
+      <p:sp>
+        <p:nvSpPr>
+          <p:cNvPr id="4" name="Slide Number Placeholder 3"/>
+          <p:cNvSpPr>
+            <a:spLocks noGrp="1"/>
+          </p:cNvSpPr>
+          <p:nvPr>
+            <p:ph type="sldNum" idx="5" sz="quarter"/>
+          </p:nvPr>
+        </p:nvSpPr>
+        <p:spPr/>
+      </p:sp>
+    </p:spTree>
+  </p:cSld>
+  <p:clrMapOvr>
+    <a:masterClrMapping/>
+  </p:clrMapOvr>
+</p:notes>
+</file>
+
+<file path=ppt/notesSlides/notesSlide2.xml><?xml version="1.0" encoding="utf-8"?>
+<p:notes xmlns:a="http://schemas.openxmlformats.org/drawingml/2006/main" xmlns:p="http://schemas.openxmlformats.org/presentationml/2006/main" xmlns:r="http://schemas.openxmlformats.org/officeDocument/2006/relationships">
+  <p:cSld>
+    <p:spTree>
+      <p:nvGrpSpPr>
+        <p:cNvPr id="1" name=""/>
+        <p:cNvGrpSpPr/>
+        <p:nvPr/>
+      </p:nvGrpSpPr>
+      <p:grpSpPr>
+        <a:xfrm>
+          <a:off x="0" y="0"/>
+          <a:ext cx="0" cy="0"/>
+          <a:chOff x="0" y="0"/>
+          <a:chExt cx="0" cy="0"/>
+        </a:xfrm>
+      </p:grpSpPr>
+      <p:sp>
+        <p:nvSpPr>
+          <p:cNvPr id="2" name="Slide Image Placeholder 1"/>
+          <p:cNvSpPr>
+            <a:spLocks noGrp="1"/>
+          </p:cNvSpPr>
+          <p:nvPr>
+            <p:ph type="sldImg" idx="2"/>
+          </p:nvPr>
+        </p:nvSpPr>
+        <p:spPr/>
+      </p:sp>
+      <p:sp>
+        <p:nvSpPr>
+          <p:cNvPr id="3" name="Notes Placeholder 2"/>
+          <p:cNvSpPr>
+            <a:spLocks noGrp="1"/>
+          </p:cNvSpPr>
+          <p:nvPr>
+            <p:ph type="body" idx="3" sz="quarter"/>
+          </p:nvPr>
+        </p:nvSpPr>
+        <p:spPr/>
+        <p:txBody>
           <a:bodyPr/>
           <a:lstStyle/>
           <a:p>
-            <a:pPr>
-              <a:defRPr sz="1000"/>
-            </a:pPr>
-          </a:p>
-        </c:txPr>
-        <c:crossAx val="-2101159928"/>
-        <c:crosses val="autoZero"/>
-        <c:crossBetween val="midCat"/>
-      </c:valAx>
-    </c:plotArea>
-    <c:plotVisOnly val="1"/>
-    <c:dispBlanksAs val="zero"/>
-    <c:showDLblsOverMax val="0"/>
-  </c:chart>
-  <c:txPr>
-    <a:bodyPr/>
-    <a:lstStyle/>
-    <a:p>
-      <a:pPr>
-        <a:defRPr sz="1800">
-          <a:latin typeface="Roboto"/>
-        </a:defRPr>
-      </a:pPr>
-      <a:endParaRPr/>
-    </a:p>
-  </c:txPr>
-  <c:externalData r:id="rId1">
-    <c:autoUpdate val="0"/>
-  </c:externalData>
-</c:chartSpace>
+            <a:r>
+              <a:t>What does it cost to win a customer?. October 2025: $261; October last year: $253; Year to date (Jul to Oct 2025): $264. 33 new customers came from $8,600 of marketing in October, against 32 from $8,600 in September: $261 each, down from $269. A lower cost per customer with steady spend usually means the marketing mix is working. Recording where each new customer came from shows the cost per channel.</a:t>
+            </a:r>
+          </a:p>
+        </p:txBody>
+      </p:sp>
+      <p:sp>
+        <p:nvSpPr>
+          <p:cNvPr id="4" name="Slide Number Placeholder 3"/>
+          <p:cNvSpPr>
+            <a:spLocks noGrp="1"/>
+          </p:cNvSpPr>
+          <p:nvPr>
+            <p:ph type="sldNum" idx="5" sz="quarter"/>
+          </p:nvPr>
+        </p:nvSpPr>
+        <p:spPr/>
+      </p:sp>
+    </p:spTree>
+  </p:cSld>
+  <p:clrMapOvr>
+    <a:masterClrMapping/>
+  </p:clrMapOvr>
+</p:notes>
 </file>
 
 <file path=ppt/slideLayouts/slideLayout1.xml><?xml version="1.0" encoding="utf-8"?>
@@ -3558,7 +3827,44 @@
       <p:grpSpPr/>
       <p:sp>
         <p:nvSpPr>
-          <p:cNvPr id="2" name="Rectangle 1"/>
+          <p:cNvPr id="2" name="Title 1"/>
+          <p:cNvSpPr>
+            <a:spLocks noGrp="1"/>
+          </p:cNvSpPr>
+          <p:nvPr>
+            <p:ph type="ctrTitle"/>
+          </p:nvPr>
+        </p:nvSpPr>
+        <p:spPr>
+          <a:xfrm>
+            <a:off x="457200" y="1965960"/>
+            <a:ext cx="11277295" cy="1097280"/>
+          </a:xfrm>
+        </p:spPr>
+        <p:txBody>
+          <a:bodyPr wrap="square"/>
+          <a:lstStyle/>
+          <a:p>
+            <a:pPr algn="l">
+              <a:defRPr>
+                <a:latin typeface="Roboto"/>
+              </a:defRPr>
+            </a:pPr>
+            <a:r>
+              <a:rPr sz="3400" b="1">
+                <a:solidFill>
+                  <a:srgbClr val="25342A"/>
+                </a:solidFill>
+                <a:latin typeface="Roboto"/>
+              </a:rPr>
+              <a:t>What does it cost to win a customer?</a:t>
+            </a:r>
+          </a:p>
+        </p:txBody>
+      </p:sp>
+      <p:sp>
+        <p:nvSpPr>
+          <p:cNvPr id="3" name="Rectangle 2"/>
           <p:cNvSpPr/>
           <p:nvPr/>
         </p:nvSpPr>
@@ -3614,7 +3920,7 @@
       </p:sp>
       <p:sp>
         <p:nvSpPr>
-          <p:cNvPr id="3" name="TextBox 2"/>
+          <p:cNvPr id="4" name="TextBox 3"/>
           <p:cNvSpPr txBox="1"/>
           <p:nvPr/>
         </p:nvSpPr>
@@ -3629,7 +3935,7 @@
           <a:noFill/>
         </p:spPr>
         <p:txBody>
-          <a:bodyPr wrap="square">
+          <a:bodyPr wrap="square" lIns="45720" rIns="45720">
             <a:spAutoFit/>
           </a:bodyPr>
           <a:lstStyle/>
@@ -3653,7 +3959,7 @@
       </p:sp>
       <p:sp>
         <p:nvSpPr>
-          <p:cNvPr id="4" name="TextBox 3"/>
+          <p:cNvPr id="5" name="TextBox 4"/>
           <p:cNvSpPr txBox="1"/>
           <p:nvPr/>
         </p:nvSpPr>
@@ -3668,7 +3974,7 @@
           <a:noFill/>
         </p:spPr>
         <p:txBody>
-          <a:bodyPr wrap="square">
+          <a:bodyPr wrap="square" lIns="45720" rIns="45720">
             <a:spAutoFit/>
           </a:bodyPr>
           <a:lstStyle/>
@@ -3692,14 +3998,14 @@
       </p:sp>
       <p:sp>
         <p:nvSpPr>
-          <p:cNvPr id="5" name="TextBox 4"/>
+          <p:cNvPr id="6" name="TextBox 5"/>
           <p:cNvSpPr txBox="1"/>
           <p:nvPr/>
         </p:nvSpPr>
         <p:spPr>
           <a:xfrm>
-            <a:off x="457200" y="2011680"/>
-            <a:ext cx="11247120" cy="1097280"/>
+            <a:off x="457200" y="3154680"/>
+            <a:ext cx="11277295" cy="457200"/>
           </a:xfrm>
           <a:prstGeom prst="rect">
             <a:avLst/>
@@ -3707,7 +4013,7 @@
           <a:noFill/>
         </p:spPr>
         <p:txBody>
-          <a:bodyPr wrap="square">
+          <a:bodyPr wrap="square" lIns="45720" rIns="45720">
             <a:spAutoFit/>
           </a:bodyPr>
           <a:lstStyle/>
@@ -3718,27 +4024,27 @@
               </a:defRPr>
             </a:pPr>
             <a:r>
-              <a:rPr sz="3400" b="1">
+              <a:rPr sz="1600" b="0">
                 <a:solidFill>
-                  <a:srgbClr val="25342A"/>
+                  <a:srgbClr val="5F6F63"/>
                 </a:solidFill>
                 <a:latin typeface="Roboto"/>
               </a:rPr>
-              <a:t>What does it cost to win a customer?</a:t>
-            </a:r>
-          </a:p>
-        </p:txBody>
-      </p:sp>
-      <p:sp>
-        <p:nvSpPr>
-          <p:cNvPr id="6" name="TextBox 5"/>
+              <a:t>Sample Electrical &amp; Air Pty Ltd</a:t>
+            </a:r>
+          </a:p>
+        </p:txBody>
+      </p:sp>
+      <p:sp>
+        <p:nvSpPr>
+          <p:cNvPr id="7" name="TextBox 6"/>
           <p:cNvSpPr txBox="1"/>
           <p:nvPr/>
         </p:nvSpPr>
         <p:spPr>
           <a:xfrm>
-            <a:off x="457200" y="3154680"/>
-            <a:ext cx="11247120" cy="457200"/>
+            <a:off x="457200" y="3703320"/>
+            <a:ext cx="11277295" cy="535940"/>
           </a:xfrm>
           <a:prstGeom prst="rect">
             <a:avLst/>
@@ -3746,7 +4052,7 @@
           <a:noFill/>
         </p:spPr>
         <p:txBody>
-          <a:bodyPr wrap="square">
+          <a:bodyPr wrap="square" lIns="45720" rIns="45720">
             <a:spAutoFit/>
           </a:bodyPr>
           <a:lstStyle/>
@@ -3757,27 +4063,27 @@
               </a:defRPr>
             </a:pPr>
             <a:r>
-              <a:rPr sz="1600" b="0">
+              <a:rPr sz="1400" b="0">
                 <a:solidFill>
-                  <a:srgbClr val="5F6F63"/>
+                  <a:srgbClr val="25342A"/>
                 </a:solidFill>
                 <a:latin typeface="Roboto"/>
               </a:rPr>
-              <a:t>Sample Electrical &amp; Air Pty Ltd</a:t>
-            </a:r>
-          </a:p>
-        </p:txBody>
-      </p:sp>
-      <p:sp>
-        <p:nvSpPr>
-          <p:cNvPr id="7" name="TextBox 6"/>
+              <a:t>Period: October 2025. Marketing spend divided by the customers it actually brought in (a customer's first ever job), month by month.</a:t>
+            </a:r>
+          </a:p>
+        </p:txBody>
+      </p:sp>
+      <p:sp>
+        <p:nvSpPr>
+          <p:cNvPr id="8" name="TextBox 7"/>
           <p:cNvSpPr txBox="1"/>
           <p:nvPr/>
         </p:nvSpPr>
         <p:spPr>
           <a:xfrm>
-            <a:off x="457200" y="3703320"/>
-            <a:ext cx="11247120" cy="1097280"/>
+            <a:off x="457200" y="4330700"/>
+            <a:ext cx="11277295" cy="1097280"/>
           </a:xfrm>
           <a:prstGeom prst="rect">
             <a:avLst/>
@@ -3785,7 +4091,7 @@
           <a:noFill/>
         </p:spPr>
         <p:txBody>
-          <a:bodyPr wrap="square">
+          <a:bodyPr wrap="square" lIns="45720" rIns="45720">
             <a:spAutoFit/>
           </a:bodyPr>
           <a:lstStyle/>
@@ -3796,27 +4102,75 @@
               </a:defRPr>
             </a:pPr>
             <a:r>
-              <a:rPr sz="1400" b="0">
+              <a:rPr sz="1100" b="0">
                 <a:solidFill>
-                  <a:srgbClr val="25342A"/>
+                  <a:srgbClr val="5F6F63"/>
                 </a:solidFill>
                 <a:latin typeface="Roboto"/>
               </a:rPr>
-              <a:t>Period: October 2025. Marketing spend divided by the customers it actually brought in (a customer's first ever job), month by month.</a:t>
-            </a:r>
-          </a:p>
-        </p:txBody>
-      </p:sp>
-      <p:sp>
-        <p:nvSpPr>
-          <p:cNvPr id="8" name="TextBox 7"/>
+              <a:t>How final is this data?</a:t>
+            </a:r>
+          </a:p>
+          <a:p>
+            <a:pPr>
+              <a:defRPr>
+                <a:latin typeface="Roboto"/>
+              </a:defRPr>
+            </a:pPr>
+            <a:r>
+              <a:rPr sz="1100" b="0">
+                <a:solidFill>
+                  <a:srgbClr val="5F6F63"/>
+                </a:solidFill>
+                <a:latin typeface="Roboto"/>
+              </a:rPr>
+              <a:t>September 2025: Locked. September 2025 is locked (closed 2 Oct 2025). These numbers won't change.</a:t>
+            </a:r>
+          </a:p>
+          <a:p>
+            <a:pPr>
+              <a:defRPr>
+                <a:latin typeface="Roboto"/>
+              </a:defRPr>
+            </a:pPr>
+            <a:r>
+              <a:rPr sz="1100" b="0">
+                <a:solidFill>
+                  <a:srgbClr val="5F6F63"/>
+                </a:solidFill>
+                <a:latin typeface="Roboto"/>
+              </a:rPr>
+              <a:t>October 2025: Locked. October 2025 is locked (closed 4 Nov 2025). These numbers won't change.</a:t>
+            </a:r>
+          </a:p>
+          <a:p>
+            <a:pPr>
+              <a:defRPr>
+                <a:latin typeface="Roboto"/>
+              </a:defRPr>
+            </a:pPr>
+            <a:r>
+              <a:rPr sz="1100" b="0">
+                <a:solidFill>
+                  <a:srgbClr val="5F6F63"/>
+                </a:solidFill>
+                <a:latin typeface="Roboto"/>
+              </a:rPr>
+              <a:t>October 2026: Incomplete. October 2026 is still in progress: figures to 6 Oct only.</a:t>
+            </a:r>
+          </a:p>
+        </p:txBody>
+      </p:sp>
+      <p:sp>
+        <p:nvSpPr>
+          <p:cNvPr id="9" name="TextBox 8"/>
           <p:cNvSpPr txBox="1"/>
           <p:nvPr/>
         </p:nvSpPr>
         <p:spPr>
           <a:xfrm>
-            <a:off x="457200" y="4937760"/>
-            <a:ext cx="11247120" cy="1097280"/>
+            <a:off x="457200" y="6492240"/>
+            <a:ext cx="2926080" cy="274320"/>
           </a:xfrm>
           <a:prstGeom prst="rect">
             <a:avLst/>
@@ -3824,7 +4178,7 @@
           <a:noFill/>
         </p:spPr>
         <p:txBody>
-          <a:bodyPr wrap="square">
+          <a:bodyPr wrap="square" lIns="45720" rIns="45720">
             <a:spAutoFit/>
           </a:bodyPr>
           <a:lstStyle/>
@@ -3835,75 +4189,27 @@
               </a:defRPr>
             </a:pPr>
             <a:r>
-              <a:rPr sz="1100" b="0">
+              <a:rPr sz="900" b="0">
                 <a:solidFill>
                   <a:srgbClr val="5F6F63"/>
                 </a:solidFill>
                 <a:latin typeface="Roboto"/>
               </a:rPr>
-              <a:t>How final is this data?</a:t>
-            </a:r>
-          </a:p>
-          <a:p>
-            <a:pPr>
-              <a:defRPr>
-                <a:latin typeface="Roboto"/>
-              </a:defRPr>
-            </a:pPr>
-            <a:r>
-              <a:rPr sz="1100" b="0">
-                <a:solidFill>
-                  <a:srgbClr val="5F6F63"/>
-                </a:solidFill>
-                <a:latin typeface="Roboto"/>
-              </a:rPr>
-              <a:t>September 2025: Locked. September 2025 is locked (closed 2 Oct 2025). These numbers won't change.</a:t>
-            </a:r>
-          </a:p>
-          <a:p>
-            <a:pPr>
-              <a:defRPr>
-                <a:latin typeface="Roboto"/>
-              </a:defRPr>
-            </a:pPr>
-            <a:r>
-              <a:rPr sz="1100" b="0">
-                <a:solidFill>
-                  <a:srgbClr val="5F6F63"/>
-                </a:solidFill>
-                <a:latin typeface="Roboto"/>
-              </a:rPr>
-              <a:t>October 2025: Locked. October 2025 is locked (closed 4 Nov 2025). These numbers won't change.</a:t>
-            </a:r>
-          </a:p>
-          <a:p>
-            <a:pPr>
-              <a:defRPr>
-                <a:latin typeface="Roboto"/>
-              </a:defRPr>
-            </a:pPr>
-            <a:r>
-              <a:rPr sz="1100" b="0">
-                <a:solidFill>
-                  <a:srgbClr val="5F6F63"/>
-                </a:solidFill>
-                <a:latin typeface="Roboto"/>
-              </a:rPr>
-              <a:t>October 2026: Incomplete. October 2026 is still in progress: figures to 6 Oct only.</a:t>
-            </a:r>
-          </a:p>
-        </p:txBody>
-      </p:sp>
-      <p:sp>
-        <p:nvSpPr>
-          <p:cNvPr id="9" name="TextBox 8"/>
+              <a:t>cost-to-win.pptx</a:t>
+            </a:r>
+          </a:p>
+        </p:txBody>
+      </p:sp>
+      <p:sp>
+        <p:nvSpPr>
+          <p:cNvPr id="10" name="TextBox 9"/>
           <p:cNvSpPr txBox="1"/>
           <p:nvPr/>
         </p:nvSpPr>
         <p:spPr>
           <a:xfrm>
-            <a:off x="457200" y="6492240"/>
-            <a:ext cx="3657600" cy="274320"/>
+            <a:off x="3108960" y="6492240"/>
+            <a:ext cx="5943600" cy="274320"/>
           </a:xfrm>
           <a:prstGeom prst="rect">
             <a:avLst/>
@@ -3911,12 +4217,12 @@
           <a:noFill/>
         </p:spPr>
         <p:txBody>
-          <a:bodyPr wrap="square">
+          <a:bodyPr wrap="square" lIns="45720" rIns="45720">
             <a:spAutoFit/>
           </a:bodyPr>
           <a:lstStyle/>
           <a:p>
-            <a:pPr>
+            <a:pPr algn="ctr">
               <a:defRPr>
                 <a:latin typeface="Roboto"/>
               </a:defRPr>
@@ -3928,21 +4234,21 @@
                 </a:solidFill>
                 <a:latin typeface="Roboto"/>
               </a:rPr>
-              <a:t>cost-to-win.pptx</a:t>
-            </a:r>
-          </a:p>
-        </p:txBody>
-      </p:sp>
-      <p:sp>
-        <p:nvSpPr>
-          <p:cNvPr id="10" name="TextBox 9"/>
+              <a:t>Data retrieved 2pm, Tue 6 Oct 2026 · Generated 8 Oct 2026, 9:35am · Sample data · Made with Python (python-pptx)</a:t>
+            </a:r>
+          </a:p>
+        </p:txBody>
+      </p:sp>
+      <p:sp>
+        <p:nvSpPr>
+          <p:cNvPr id="11" name="TextBox 10"/>
           <p:cNvSpPr txBox="1"/>
           <p:nvPr/>
         </p:nvSpPr>
         <p:spPr>
           <a:xfrm>
-            <a:off x="4297680" y="6492240"/>
-            <a:ext cx="3657600" cy="274320"/>
+            <a:off x="8503920" y="6492240"/>
+            <a:ext cx="3200400" cy="274320"/>
           </a:xfrm>
           <a:prstGeom prst="rect">
             <a:avLst/>
@@ -3950,12 +4256,12 @@
           <a:noFill/>
         </p:spPr>
         <p:txBody>
-          <a:bodyPr wrap="square">
+          <a:bodyPr wrap="square" lIns="45720" rIns="45720">
             <a:spAutoFit/>
           </a:bodyPr>
           <a:lstStyle/>
           <a:p>
-            <a:pPr algn="ctr">
+            <a:pPr algn="r">
               <a:defRPr>
                 <a:latin typeface="Roboto"/>
               </a:defRPr>
@@ -3967,46 +4273,7 @@
                 </a:solidFill>
                 <a:latin typeface="Roboto"/>
               </a:rPr>
-              <a:t>Data retrieved 2pm, Tue 6 Oct 2026 · Sample data</a:t>
-            </a:r>
-          </a:p>
-        </p:txBody>
-      </p:sp>
-      <p:sp>
-        <p:nvSpPr>
-          <p:cNvPr id="11" name="TextBox 10"/>
-          <p:cNvSpPr txBox="1"/>
-          <p:nvPr/>
-        </p:nvSpPr>
-        <p:spPr>
-          <a:xfrm>
-            <a:off x="8503920" y="6492240"/>
-            <a:ext cx="3200400" cy="274320"/>
-          </a:xfrm>
-          <a:prstGeom prst="rect">
-            <a:avLst/>
-          </a:prstGeom>
-          <a:noFill/>
-        </p:spPr>
-        <p:txBody>
-          <a:bodyPr wrap="square">
-            <a:spAutoFit/>
-          </a:bodyPr>
-          <a:lstStyle/>
-          <a:p>
-            <a:pPr algn="r">
-              <a:defRPr>
-                <a:latin typeface="Roboto"/>
-              </a:defRPr>
-            </a:pPr>
-            <a:r>
-              <a:rPr sz="900" b="0">
-                <a:solidFill>
-                  <a:srgbClr val="5F6F63"/>
-                </a:solidFill>
-                <a:latin typeface="Roboto"/>
-              </a:rPr>
-              <a:t>Slide 1 of 5</a:t>
+              <a:t>Slide 1 of 2</a:t>
             </a:r>
           </a:p>
         </p:txBody>
@@ -4031,7 +4298,44 @@
       <p:grpSpPr/>
       <p:sp>
         <p:nvSpPr>
-          <p:cNvPr id="2" name="Rectangle 1"/>
+          <p:cNvPr id="2" name="Title 1"/>
+          <p:cNvSpPr>
+            <a:spLocks noGrp="1"/>
+          </p:cNvSpPr>
+          <p:nvPr>
+            <p:ph type="title"/>
+          </p:nvPr>
+        </p:nvSpPr>
+        <p:spPr>
+          <a:xfrm>
+            <a:off x="457200" y="384048"/>
+            <a:ext cx="11277295" cy="475488"/>
+          </a:xfrm>
+        </p:spPr>
+        <p:txBody>
+          <a:bodyPr wrap="square" lIns="45720" rIns="45720" tIns="0" bIns="0" anchor="t"/>
+          <a:lstStyle/>
+          <a:p>
+            <a:pPr algn="l">
+              <a:defRPr>
+                <a:latin typeface="Roboto"/>
+              </a:defRPr>
+            </a:pPr>
+            <a:r>
+              <a:rPr sz="2400" b="1">
+                <a:solidFill>
+                  <a:srgbClr val="25342A"/>
+                </a:solidFill>
+                <a:latin typeface="Roboto"/>
+              </a:rPr>
+              <a:t>What does it cost to win a customer?</a:t>
+            </a:r>
+          </a:p>
+        </p:txBody>
+      </p:sp>
+      <p:sp>
+        <p:nvSpPr>
+          <p:cNvPr id="3" name="Rectangle 2"/>
           <p:cNvSpPr/>
           <p:nvPr/>
         </p:nvSpPr>
@@ -4078,14 +4382,14 @@
       </p:sp>
       <p:sp>
         <p:nvSpPr>
-          <p:cNvPr id="3" name="TextBox 2"/>
+          <p:cNvPr id="4" name="TextBox 3"/>
           <p:cNvSpPr txBox="1"/>
           <p:nvPr/>
         </p:nvSpPr>
         <p:spPr>
           <a:xfrm>
-            <a:off x="457200" y="164592"/>
-            <a:ext cx="7315200" cy="274320"/>
+            <a:off x="457200" y="146304"/>
+            <a:ext cx="8229600" cy="256032"/>
           </a:xfrm>
           <a:prstGeom prst="rect">
             <a:avLst/>
@@ -4093,7 +4397,7 @@
           <a:noFill/>
         </p:spPr>
         <p:txBody>
-          <a:bodyPr wrap="square">
+          <a:bodyPr wrap="square" lIns="45720" rIns="45720">
             <a:spAutoFit/>
           </a:bodyPr>
           <a:lstStyle/>
@@ -4117,14 +4421,14 @@
       </p:sp>
       <p:sp>
         <p:nvSpPr>
-          <p:cNvPr id="4" name="TextBox 3"/>
+          <p:cNvPr id="5" name="TextBox 4"/>
           <p:cNvSpPr txBox="1"/>
           <p:nvPr/>
         </p:nvSpPr>
         <p:spPr>
           <a:xfrm>
-            <a:off x="457200" y="411480"/>
-            <a:ext cx="11247120" cy="548640"/>
+            <a:off x="457200" y="914400"/>
+            <a:ext cx="11277295" cy="263652"/>
           </a:xfrm>
           <a:prstGeom prst="rect">
             <a:avLst/>
@@ -4132,7 +4436,7 @@
           <a:noFill/>
         </p:spPr>
         <p:txBody>
-          <a:bodyPr wrap="square">
+          <a:bodyPr wrap="square" lIns="45720" rIns="45720">
             <a:spAutoFit/>
           </a:bodyPr>
           <a:lstStyle/>
@@ -4143,27 +4447,27 @@
               </a:defRPr>
             </a:pPr>
             <a:r>
-              <a:rPr sz="2400" b="1">
+              <a:rPr sz="1200" b="0">
                 <a:solidFill>
-                  <a:srgbClr val="25342A"/>
+                  <a:srgbClr val="5F6F63"/>
                 </a:solidFill>
                 <a:latin typeface="Roboto"/>
               </a:rPr>
-              <a:t>Headline numbers</a:t>
-            </a:r>
-          </a:p>
-        </p:txBody>
-      </p:sp>
-      <p:sp>
-        <p:nvSpPr>
-          <p:cNvPr id="5" name="Rectangle 4"/>
+              <a:t>Cost to win a customer, by month</a:t>
+            </a:r>
+          </a:p>
+        </p:txBody>
+      </p:sp>
+      <p:sp>
+        <p:nvSpPr>
+          <p:cNvPr id="6" name="Rectangle 5"/>
           <p:cNvSpPr/>
           <p:nvPr/>
         </p:nvSpPr>
         <p:spPr>
           <a:xfrm>
-            <a:off x="457200" y="1645920"/>
-            <a:ext cx="3576218" cy="2011680"/>
+            <a:off x="457200" y="1278636"/>
+            <a:ext cx="3606698" cy="1188720"/>
           </a:xfrm>
           <a:prstGeom prst="rect">
             <a:avLst/>
@@ -4205,14 +4509,14 @@
       </p:sp>
       <p:sp>
         <p:nvSpPr>
-          <p:cNvPr id="6" name="TextBox 5"/>
+          <p:cNvPr id="7" name="TextBox 6"/>
           <p:cNvSpPr txBox="1"/>
           <p:nvPr/>
         </p:nvSpPr>
         <p:spPr>
           <a:xfrm>
-            <a:off x="640080" y="1783080"/>
-            <a:ext cx="3210458" cy="457200"/>
+            <a:off x="594360" y="1351788"/>
+            <a:ext cx="3332378" cy="384048"/>
           </a:xfrm>
           <a:prstGeom prst="rect">
             <a:avLst/>
@@ -4220,7 +4524,7 @@
           <a:noFill/>
         </p:spPr>
         <p:txBody>
-          <a:bodyPr wrap="square">
+          <a:bodyPr wrap="square" lIns="45720" rIns="45720">
             <a:spAutoFit/>
           </a:bodyPr>
           <a:lstStyle/>
@@ -4231,7 +4535,7 @@
               </a:defRPr>
             </a:pPr>
             <a:r>
-              <a:rPr sz="1200" b="0">
+              <a:rPr sz="1100" b="0">
                 <a:solidFill>
                   <a:srgbClr val="5F6F63"/>
                 </a:solidFill>
@@ -4244,14 +4548,14 @@
       </p:sp>
       <p:sp>
         <p:nvSpPr>
-          <p:cNvPr id="7" name="TextBox 6"/>
+          <p:cNvPr id="8" name="TextBox 7"/>
           <p:cNvSpPr txBox="1"/>
           <p:nvPr/>
         </p:nvSpPr>
         <p:spPr>
           <a:xfrm>
-            <a:off x="640080" y="2240280"/>
-            <a:ext cx="3210458" cy="731520"/>
+            <a:off x="594360" y="1717548"/>
+            <a:ext cx="3332378" cy="502920"/>
           </a:xfrm>
           <a:prstGeom prst="rect">
             <a:avLst/>
@@ -4259,7 +4563,7 @@
           <a:noFill/>
         </p:spPr>
         <p:txBody>
-          <a:bodyPr wrap="square">
+          <a:bodyPr wrap="square" lIns="45720" rIns="45720">
             <a:spAutoFit/>
           </a:bodyPr>
           <a:lstStyle/>
@@ -4270,7 +4574,7 @@
               </a:defRPr>
             </a:pPr>
             <a:r>
-              <a:rPr sz="3000" b="1">
+              <a:rPr sz="2200" b="1">
                 <a:solidFill>
                   <a:srgbClr val="2F7A5D"/>
                 </a:solidFill>
@@ -4283,14 +4587,14 @@
       </p:sp>
       <p:sp>
         <p:nvSpPr>
-          <p:cNvPr id="8" name="TextBox 7"/>
+          <p:cNvPr id="9" name="TextBox 8"/>
           <p:cNvSpPr txBox="1"/>
           <p:nvPr/>
         </p:nvSpPr>
         <p:spPr>
           <a:xfrm>
-            <a:off x="640080" y="3017520"/>
-            <a:ext cx="3210458" cy="548640"/>
+            <a:off x="594360" y="2083308"/>
+            <a:ext cx="3332378" cy="329184"/>
           </a:xfrm>
           <a:prstGeom prst="rect">
             <a:avLst/>
@@ -4298,7 +4602,7 @@
           <a:noFill/>
         </p:spPr>
         <p:txBody>
-          <a:bodyPr wrap="square">
+          <a:bodyPr wrap="square" lIns="45720" rIns="45720">
             <a:spAutoFit/>
           </a:bodyPr>
           <a:lstStyle/>
@@ -4309,7 +4613,7 @@
               </a:defRPr>
             </a:pPr>
             <a:r>
-              <a:rPr sz="1100" b="0">
+              <a:rPr sz="1000" b="0">
                 <a:solidFill>
                   <a:srgbClr val="5F6F63"/>
                 </a:solidFill>
@@ -4322,14 +4626,14 @@
       </p:sp>
       <p:sp>
         <p:nvSpPr>
-          <p:cNvPr id="9" name="Rectangle 8"/>
+          <p:cNvPr id="10" name="Rectangle 9"/>
           <p:cNvSpPr/>
           <p:nvPr/>
         </p:nvSpPr>
         <p:spPr>
           <a:xfrm>
-            <a:off x="4307738" y="1645920"/>
-            <a:ext cx="3576218" cy="2011680"/>
+            <a:off x="4292498" y="1278636"/>
+            <a:ext cx="3606698" cy="1188720"/>
           </a:xfrm>
           <a:prstGeom prst="rect">
             <a:avLst/>
@@ -4371,14 +4675,14 @@
       </p:sp>
       <p:sp>
         <p:nvSpPr>
-          <p:cNvPr id="10" name="TextBox 9"/>
+          <p:cNvPr id="11" name="TextBox 10"/>
           <p:cNvSpPr txBox="1"/>
           <p:nvPr/>
         </p:nvSpPr>
         <p:spPr>
           <a:xfrm>
-            <a:off x="4490618" y="1783080"/>
-            <a:ext cx="3210458" cy="457200"/>
+            <a:off x="4429658" y="1351788"/>
+            <a:ext cx="3332378" cy="384048"/>
           </a:xfrm>
           <a:prstGeom prst="rect">
             <a:avLst/>
@@ -4386,7 +4690,7 @@
           <a:noFill/>
         </p:spPr>
         <p:txBody>
-          <a:bodyPr wrap="square">
+          <a:bodyPr wrap="square" lIns="45720" rIns="45720">
             <a:spAutoFit/>
           </a:bodyPr>
           <a:lstStyle/>
@@ -4397,7 +4701,7 @@
               </a:defRPr>
             </a:pPr>
             <a:r>
-              <a:rPr sz="1200" b="0">
+              <a:rPr sz="1100" b="0">
                 <a:solidFill>
                   <a:srgbClr val="5F6F63"/>
                 </a:solidFill>
@@ -4410,14 +4714,14 @@
       </p:sp>
       <p:sp>
         <p:nvSpPr>
-          <p:cNvPr id="11" name="TextBox 10"/>
+          <p:cNvPr id="12" name="TextBox 11"/>
           <p:cNvSpPr txBox="1"/>
           <p:nvPr/>
         </p:nvSpPr>
         <p:spPr>
           <a:xfrm>
-            <a:off x="4490618" y="2240280"/>
-            <a:ext cx="3210458" cy="731520"/>
+            <a:off x="4429658" y="1717548"/>
+            <a:ext cx="3332378" cy="502920"/>
           </a:xfrm>
           <a:prstGeom prst="rect">
             <a:avLst/>
@@ -4425,7 +4729,7 @@
           <a:noFill/>
         </p:spPr>
         <p:txBody>
-          <a:bodyPr wrap="square">
+          <a:bodyPr wrap="square" lIns="45720" rIns="45720">
             <a:spAutoFit/>
           </a:bodyPr>
           <a:lstStyle/>
@@ -4436,7 +4740,7 @@
               </a:defRPr>
             </a:pPr>
             <a:r>
-              <a:rPr sz="3000" b="1">
+              <a:rPr sz="2200" b="1">
                 <a:solidFill>
                   <a:srgbClr val="2F7A5D"/>
                 </a:solidFill>
@@ -4449,14 +4753,14 @@
       </p:sp>
       <p:sp>
         <p:nvSpPr>
-          <p:cNvPr id="12" name="TextBox 11"/>
+          <p:cNvPr id="13" name="TextBox 12"/>
           <p:cNvSpPr txBox="1"/>
           <p:nvPr/>
         </p:nvSpPr>
         <p:spPr>
           <a:xfrm>
-            <a:off x="4490618" y="3017520"/>
-            <a:ext cx="3210458" cy="548640"/>
+            <a:off x="4429658" y="2083308"/>
+            <a:ext cx="3332378" cy="329184"/>
           </a:xfrm>
           <a:prstGeom prst="rect">
             <a:avLst/>
@@ -4464,7 +4768,7 @@
           <a:noFill/>
         </p:spPr>
         <p:txBody>
-          <a:bodyPr wrap="square">
+          <a:bodyPr wrap="square" lIns="45720" rIns="45720">
             <a:spAutoFit/>
           </a:bodyPr>
           <a:lstStyle/>
@@ -4475,7 +4779,7 @@
               </a:defRPr>
             </a:pPr>
             <a:r>
-              <a:rPr sz="1100" b="0">
+              <a:rPr sz="1000" b="0">
                 <a:solidFill>
                   <a:srgbClr val="5F6F63"/>
                 </a:solidFill>
@@ -4488,14 +4792,14 @@
       </p:sp>
       <p:sp>
         <p:nvSpPr>
-          <p:cNvPr id="13" name="Rectangle 12"/>
+          <p:cNvPr id="14" name="Rectangle 13"/>
           <p:cNvSpPr/>
           <p:nvPr/>
         </p:nvSpPr>
         <p:spPr>
           <a:xfrm>
-            <a:off x="8158276" y="1645920"/>
-            <a:ext cx="3576218" cy="2011680"/>
+            <a:off x="8127796" y="1278636"/>
+            <a:ext cx="3606698" cy="1188720"/>
           </a:xfrm>
           <a:prstGeom prst="rect">
             <a:avLst/>
@@ -4537,14 +4841,14 @@
       </p:sp>
       <p:sp>
         <p:nvSpPr>
-          <p:cNvPr id="14" name="TextBox 13"/>
+          <p:cNvPr id="15" name="TextBox 14"/>
           <p:cNvSpPr txBox="1"/>
           <p:nvPr/>
         </p:nvSpPr>
         <p:spPr>
           <a:xfrm>
-            <a:off x="8341156" y="1783080"/>
-            <a:ext cx="3210458" cy="457200"/>
+            <a:off x="8264956" y="1351788"/>
+            <a:ext cx="3332378" cy="384048"/>
           </a:xfrm>
           <a:prstGeom prst="rect">
             <a:avLst/>
@@ -4552,7 +4856,7 @@
           <a:noFill/>
         </p:spPr>
         <p:txBody>
-          <a:bodyPr wrap="square">
+          <a:bodyPr wrap="square" lIns="45720" rIns="45720">
             <a:spAutoFit/>
           </a:bodyPr>
           <a:lstStyle/>
@@ -4563,7 +4867,7 @@
               </a:defRPr>
             </a:pPr>
             <a:r>
-              <a:rPr sz="1200" b="0">
+              <a:rPr sz="1100" b="0">
                 <a:solidFill>
                   <a:srgbClr val="5F6F63"/>
                 </a:solidFill>
@@ -4576,14 +4880,14 @@
       </p:sp>
       <p:sp>
         <p:nvSpPr>
-          <p:cNvPr id="15" name="TextBox 14"/>
+          <p:cNvPr id="16" name="TextBox 15"/>
           <p:cNvSpPr txBox="1"/>
           <p:nvPr/>
         </p:nvSpPr>
         <p:spPr>
           <a:xfrm>
-            <a:off x="8341156" y="2240280"/>
-            <a:ext cx="3210458" cy="731520"/>
+            <a:off x="8264956" y="1717548"/>
+            <a:ext cx="3332378" cy="502920"/>
           </a:xfrm>
           <a:prstGeom prst="rect">
             <a:avLst/>
@@ -4591,7 +4895,7 @@
           <a:noFill/>
         </p:spPr>
         <p:txBody>
-          <a:bodyPr wrap="square">
+          <a:bodyPr wrap="square" lIns="45720" rIns="45720">
             <a:spAutoFit/>
           </a:bodyPr>
           <a:lstStyle/>
@@ -4602,7 +4906,7 @@
               </a:defRPr>
             </a:pPr>
             <a:r>
-              <a:rPr sz="3000" b="1">
+              <a:rPr sz="2200" b="1">
                 <a:solidFill>
                   <a:srgbClr val="2F7A5D"/>
                 </a:solidFill>
@@ -4615,14 +4919,14 @@
       </p:sp>
       <p:sp>
         <p:nvSpPr>
-          <p:cNvPr id="16" name="TextBox 15"/>
+          <p:cNvPr id="17" name="TextBox 16"/>
           <p:cNvSpPr txBox="1"/>
           <p:nvPr/>
         </p:nvSpPr>
         <p:spPr>
           <a:xfrm>
-            <a:off x="8341156" y="3017520"/>
-            <a:ext cx="3210458" cy="548640"/>
+            <a:off x="8264956" y="2083308"/>
+            <a:ext cx="3332378" cy="329184"/>
           </a:xfrm>
           <a:prstGeom prst="rect">
             <a:avLst/>
@@ -4630,7 +4934,7 @@
           <a:noFill/>
         </p:spPr>
         <p:txBody>
-          <a:bodyPr wrap="square">
+          <a:bodyPr wrap="square" lIns="45720" rIns="45720">
             <a:spAutoFit/>
           </a:bodyPr>
           <a:lstStyle/>
@@ -4641,7 +4945,7 @@
               </a:defRPr>
             </a:pPr>
             <a:r>
-              <a:rPr sz="1100" b="0">
+              <a:rPr sz="1000" b="0">
                 <a:solidFill>
                   <a:srgbClr val="5F6F63"/>
                 </a:solidFill>
@@ -4652,160 +4956,45 @@
           </a:p>
         </p:txBody>
       </p:sp>
-      <p:sp>
-        <p:nvSpPr>
-          <p:cNvPr id="17" name="TextBox 16"/>
-          <p:cNvSpPr txBox="1"/>
+      <p:graphicFrame>
+        <p:nvGraphicFramePr>
+          <p:cNvPr id="18" name="Chart 17"/>
+          <p:cNvGraphicFramePr>
+            <a:graphicFrameLocks noGrp="1"/>
+          </p:cNvGraphicFramePr>
           <p:nvPr/>
-        </p:nvSpPr>
-        <p:spPr>
-          <a:xfrm>
-            <a:off x="457200" y="6492240"/>
-            <a:ext cx="3657600" cy="274320"/>
-          </a:xfrm>
-          <a:prstGeom prst="rect">
-            <a:avLst/>
-          </a:prstGeom>
-          <a:noFill/>
-        </p:spPr>
-        <p:txBody>
-          <a:bodyPr wrap="square">
-            <a:spAutoFit/>
-          </a:bodyPr>
-          <a:lstStyle/>
-          <a:p>
-            <a:pPr>
-              <a:defRPr>
-                <a:latin typeface="Roboto"/>
-              </a:defRPr>
-            </a:pPr>
-            <a:r>
-              <a:rPr sz="900" b="0">
-                <a:solidFill>
-                  <a:srgbClr val="5F6F63"/>
-                </a:solidFill>
-                <a:latin typeface="Roboto"/>
-              </a:rPr>
-              <a:t>cost-to-win.pptx</a:t>
-            </a:r>
-          </a:p>
-        </p:txBody>
-      </p:sp>
-      <p:sp>
-        <p:nvSpPr>
-          <p:cNvPr id="18" name="TextBox 17"/>
-          <p:cNvSpPr txBox="1"/>
-          <p:nvPr/>
-        </p:nvSpPr>
-        <p:spPr>
-          <a:xfrm>
-            <a:off x="4297680" y="6492240"/>
-            <a:ext cx="3657600" cy="274320"/>
-          </a:xfrm>
-          <a:prstGeom prst="rect">
-            <a:avLst/>
-          </a:prstGeom>
-          <a:noFill/>
-        </p:spPr>
-        <p:txBody>
-          <a:bodyPr wrap="square">
-            <a:spAutoFit/>
-          </a:bodyPr>
-          <a:lstStyle/>
-          <a:p>
-            <a:pPr algn="ctr">
-              <a:defRPr>
-                <a:latin typeface="Roboto"/>
-              </a:defRPr>
-            </a:pPr>
-            <a:r>
-              <a:rPr sz="900" b="0">
-                <a:solidFill>
-                  <a:srgbClr val="5F6F63"/>
-                </a:solidFill>
-                <a:latin typeface="Roboto"/>
-              </a:rPr>
-              <a:t>Data retrieved 2pm, Tue 6 Oct 2026 · Sample data</a:t>
-            </a:r>
-          </a:p>
-        </p:txBody>
-      </p:sp>
-      <p:sp>
-        <p:nvSpPr>
-          <p:cNvPr id="19" name="TextBox 18"/>
-          <p:cNvSpPr txBox="1"/>
-          <p:nvPr/>
-        </p:nvSpPr>
-        <p:spPr>
-          <a:xfrm>
-            <a:off x="8503920" y="6492240"/>
-            <a:ext cx="3200400" cy="274320"/>
-          </a:xfrm>
-          <a:prstGeom prst="rect">
-            <a:avLst/>
-          </a:prstGeom>
-          <a:noFill/>
-        </p:spPr>
-        <p:txBody>
-          <a:bodyPr wrap="square">
-            <a:spAutoFit/>
-          </a:bodyPr>
-          <a:lstStyle/>
-          <a:p>
-            <a:pPr algn="r">
-              <a:defRPr>
-                <a:latin typeface="Roboto"/>
-              </a:defRPr>
-            </a:pPr>
-            <a:r>
-              <a:rPr sz="900" b="0">
-                <a:solidFill>
-                  <a:srgbClr val="5F6F63"/>
-                </a:solidFill>
-                <a:latin typeface="Roboto"/>
-              </a:rPr>
-              <a:t>Slide 2 of 5</a:t>
-            </a:r>
-          </a:p>
-        </p:txBody>
-      </p:sp>
-    </p:spTree>
-  </p:cSld>
-  <p:clrMapOvr>
-    <a:masterClrMapping/>
-  </p:clrMapOvr>
-</p:sld>
-</file>
-
-<file path=ppt/slides/slide3.xml><?xml version="1.0" encoding="utf-8"?>
-<p:sld xmlns:a="http://schemas.openxmlformats.org/drawingml/2006/main" xmlns:p="http://schemas.openxmlformats.org/presentationml/2006/main" xmlns:r="http://schemas.openxmlformats.org/officeDocument/2006/relationships">
-  <p:cSld>
-    <p:spTree>
-      <p:nvGrpSpPr>
-        <p:cNvPr id="1" name=""/>
-        <p:cNvGrpSpPr/>
-        <p:nvPr/>
-      </p:nvGrpSpPr>
-      <p:grpSpPr/>
-      <p:sp>
-        <p:nvSpPr>
-          <p:cNvPr id="2" name="Rectangle 1"/>
+        </p:nvGraphicFramePr>
+        <p:xfrm>
+          <a:off x="457200" y="2604516"/>
+          <a:ext cx="11277295" cy="2516124"/>
+        </p:xfrm>
+        <a:graphic>
+          <a:graphicData uri="http://schemas.openxmlformats.org/drawingml/2006/chart">
+            <c:chart xmlns:c="http://schemas.openxmlformats.org/drawingml/2006/chart" r:id="rId3"/>
+          </a:graphicData>
+        </a:graphic>
+      </p:graphicFrame>
+      <p:sp>
+        <p:nvSpPr>
+          <p:cNvPr id="19" name="Rectangle 18"/>
           <p:cNvSpPr/>
           <p:nvPr/>
         </p:nvSpPr>
         <p:spPr>
           <a:xfrm>
-            <a:off x="0" y="0"/>
-            <a:ext cx="12191695" cy="73152"/>
+            <a:off x="457200" y="5212080"/>
+            <a:ext cx="5501487" cy="1097280"/>
           </a:xfrm>
           <a:prstGeom prst="rect">
             <a:avLst/>
           </a:prstGeom>
           <a:solidFill>
-            <a:srgbClr val="2F7A5D"/>
+            <a:srgbClr val="FFFFFF"/>
           </a:solidFill>
           <a:ln>
-            <a:noFill/>
+            <a:solidFill>
+              <a:srgbClr val="DCE8DC"/>
+            </a:solidFill>
           </a:ln>
         </p:spPr>
         <p:style>
@@ -4836,14 +5025,14 @@
       </p:sp>
       <p:sp>
         <p:nvSpPr>
-          <p:cNvPr id="3" name="TextBox 2"/>
+          <p:cNvPr id="20" name="TextBox 19"/>
           <p:cNvSpPr txBox="1"/>
           <p:nvPr/>
         </p:nvSpPr>
         <p:spPr>
           <a:xfrm>
-            <a:off x="457200" y="164592"/>
-            <a:ext cx="7315200" cy="274320"/>
+            <a:off x="594360" y="5266944"/>
+            <a:ext cx="5227167" cy="274320"/>
           </a:xfrm>
           <a:prstGeom prst="rect">
             <a:avLst/>
@@ -4851,7 +5040,7 @@
           <a:noFill/>
         </p:spPr>
         <p:txBody>
-          <a:bodyPr wrap="square">
+          <a:bodyPr wrap="square" lIns="45720" rIns="45720">
             <a:spAutoFit/>
           </a:bodyPr>
           <a:lstStyle/>
@@ -4862,27 +5051,27 @@
               </a:defRPr>
             </a:pPr>
             <a:r>
-              <a:rPr sz="1000" b="0">
+              <a:rPr sz="1000" b="1">
                 <a:solidFill>
                   <a:srgbClr val="5F6F63"/>
                 </a:solidFill>
                 <a:latin typeface="Roboto"/>
               </a:rPr>
-              <a:t>Sample Electrical &amp; Air Pty Ltd · What does it cost to win a customer?</a:t>
-            </a:r>
-          </a:p>
-        </p:txBody>
-      </p:sp>
-      <p:sp>
-        <p:nvSpPr>
-          <p:cNvPr id="4" name="TextBox 3"/>
+              <a:t>WHAT IT SHOWS</a:t>
+            </a:r>
+          </a:p>
+        </p:txBody>
+      </p:sp>
+      <p:sp>
+        <p:nvSpPr>
+          <p:cNvPr id="21" name="TextBox 20"/>
           <p:cNvSpPr txBox="1"/>
           <p:nvPr/>
         </p:nvSpPr>
         <p:spPr>
           <a:xfrm>
-            <a:off x="457200" y="411480"/>
-            <a:ext cx="11247120" cy="548640"/>
+            <a:off x="594360" y="5541264"/>
+            <a:ext cx="5227167" cy="731520"/>
           </a:xfrm>
           <a:prstGeom prst="rect">
             <a:avLst/>
@@ -4890,7 +5079,7 @@
           <a:noFill/>
         </p:spPr>
         <p:txBody>
-          <a:bodyPr wrap="square">
+          <a:bodyPr wrap="square" lIns="45720" rIns="45720">
             <a:spAutoFit/>
           </a:bodyPr>
           <a:lstStyle/>
@@ -4901,228 +5090,38 @@
               </a:defRPr>
             </a:pPr>
             <a:r>
-              <a:rPr sz="2400" b="1">
+              <a:rPr sz="1200" b="0">
                 <a:solidFill>
                   <a:srgbClr val="25342A"/>
                 </a:solidFill>
                 <a:latin typeface="Roboto"/>
               </a:rPr>
-              <a:t>Cost to win a customer, by month · $ per new customer</a:t>
-            </a:r>
-          </a:p>
-        </p:txBody>
-      </p:sp>
-      <p:sp>
-        <p:nvSpPr>
-          <p:cNvPr id="5" name="TextBox 4"/>
-          <p:cNvSpPr txBox="1"/>
-          <p:nvPr/>
-        </p:nvSpPr>
-        <p:spPr>
-          <a:xfrm>
-            <a:off x="457200" y="960120"/>
-            <a:ext cx="11247120" cy="457200"/>
-          </a:xfrm>
-          <a:prstGeom prst="rect">
-            <a:avLst/>
-          </a:prstGeom>
-          <a:noFill/>
-        </p:spPr>
-        <p:txBody>
-          <a:bodyPr wrap="square">
-            <a:spAutoFit/>
-          </a:bodyPr>
-          <a:lstStyle/>
-          <a:p>
-            <a:pPr>
-              <a:defRPr>
-                <a:latin typeface="Roboto"/>
-              </a:defRPr>
-            </a:pPr>
-            <a:r>
-              <a:rPr sz="1200" b="0">
-                <a:solidFill>
-                  <a:srgbClr val="5F6F63"/>
-                </a:solidFill>
-                <a:latin typeface="Roboto"/>
-              </a:rPr>
-              <a:t>Customers are counted in the month of their first job.</a:t>
-            </a:r>
-          </a:p>
-        </p:txBody>
-      </p:sp>
-      <p:graphicFrame>
-        <p:nvGraphicFramePr>
-          <p:cNvPr id="6" name="Chart 5"/>
-          <p:cNvGraphicFramePr>
-            <a:graphicFrameLocks noGrp="1"/>
-          </p:cNvGraphicFramePr>
-          <p:nvPr/>
-        </p:nvGraphicFramePr>
-        <p:xfrm>
-          <a:off x="457200" y="1463040"/>
-          <a:ext cx="11247120" cy="4754880"/>
-        </p:xfrm>
-        <a:graphic>
-          <a:graphicData uri="http://schemas.openxmlformats.org/drawingml/2006/chart">
-            <c:chart xmlns:c="http://schemas.openxmlformats.org/drawingml/2006/chart" r:id="rId2"/>
-          </a:graphicData>
-        </a:graphic>
-      </p:graphicFrame>
-      <p:sp>
-        <p:nvSpPr>
-          <p:cNvPr id="7" name="TextBox 6"/>
-          <p:cNvSpPr txBox="1"/>
-          <p:nvPr/>
-        </p:nvSpPr>
-        <p:spPr>
-          <a:xfrm>
-            <a:off x="457200" y="6492240"/>
-            <a:ext cx="3657600" cy="274320"/>
-          </a:xfrm>
-          <a:prstGeom prst="rect">
-            <a:avLst/>
-          </a:prstGeom>
-          <a:noFill/>
-        </p:spPr>
-        <p:txBody>
-          <a:bodyPr wrap="square">
-            <a:spAutoFit/>
-          </a:bodyPr>
-          <a:lstStyle/>
-          <a:p>
-            <a:pPr>
-              <a:defRPr>
-                <a:latin typeface="Roboto"/>
-              </a:defRPr>
-            </a:pPr>
-            <a:r>
-              <a:rPr sz="900" b="0">
-                <a:solidFill>
-                  <a:srgbClr val="5F6F63"/>
-                </a:solidFill>
-                <a:latin typeface="Roboto"/>
-              </a:rPr>
-              <a:t>cost-to-win.pptx</a:t>
-            </a:r>
-          </a:p>
-        </p:txBody>
-      </p:sp>
-      <p:sp>
-        <p:nvSpPr>
-          <p:cNvPr id="8" name="TextBox 7"/>
-          <p:cNvSpPr txBox="1"/>
-          <p:nvPr/>
-        </p:nvSpPr>
-        <p:spPr>
-          <a:xfrm>
-            <a:off x="4297680" y="6492240"/>
-            <a:ext cx="3657600" cy="274320"/>
-          </a:xfrm>
-          <a:prstGeom prst="rect">
-            <a:avLst/>
-          </a:prstGeom>
-          <a:noFill/>
-        </p:spPr>
-        <p:txBody>
-          <a:bodyPr wrap="square">
-            <a:spAutoFit/>
-          </a:bodyPr>
-          <a:lstStyle/>
-          <a:p>
-            <a:pPr algn="ctr">
-              <a:defRPr>
-                <a:latin typeface="Roboto"/>
-              </a:defRPr>
-            </a:pPr>
-            <a:r>
-              <a:rPr sz="900" b="0">
-                <a:solidFill>
-                  <a:srgbClr val="5F6F63"/>
-                </a:solidFill>
-                <a:latin typeface="Roboto"/>
-              </a:rPr>
-              <a:t>Data retrieved 2pm, Tue 6 Oct 2026 · Sample data</a:t>
-            </a:r>
-          </a:p>
-        </p:txBody>
-      </p:sp>
-      <p:sp>
-        <p:nvSpPr>
-          <p:cNvPr id="9" name="TextBox 8"/>
-          <p:cNvSpPr txBox="1"/>
-          <p:nvPr/>
-        </p:nvSpPr>
-        <p:spPr>
-          <a:xfrm>
-            <a:off x="8503920" y="6492240"/>
-            <a:ext cx="3200400" cy="274320"/>
-          </a:xfrm>
-          <a:prstGeom prst="rect">
-            <a:avLst/>
-          </a:prstGeom>
-          <a:noFill/>
-        </p:spPr>
-        <p:txBody>
-          <a:bodyPr wrap="square">
-            <a:spAutoFit/>
-          </a:bodyPr>
-          <a:lstStyle/>
-          <a:p>
-            <a:pPr algn="r">
-              <a:defRPr>
-                <a:latin typeface="Roboto"/>
-              </a:defRPr>
-            </a:pPr>
-            <a:r>
-              <a:rPr sz="900" b="0">
-                <a:solidFill>
-                  <a:srgbClr val="5F6F63"/>
-                </a:solidFill>
-                <a:latin typeface="Roboto"/>
-              </a:rPr>
-              <a:t>Slide 3 of 5</a:t>
-            </a:r>
-          </a:p>
-        </p:txBody>
-      </p:sp>
-    </p:spTree>
-  </p:cSld>
-  <p:clrMapOvr>
-    <a:masterClrMapping/>
-  </p:clrMapOvr>
-</p:sld>
-</file>
-
-<file path=ppt/slides/slide4.xml><?xml version="1.0" encoding="utf-8"?>
-<p:sld xmlns:a="http://schemas.openxmlformats.org/drawingml/2006/main" xmlns:p="http://schemas.openxmlformats.org/presentationml/2006/main" xmlns:r="http://schemas.openxmlformats.org/officeDocument/2006/relationships">
-  <p:cSld>
-    <p:spTree>
-      <p:nvGrpSpPr>
-        <p:cNvPr id="1" name=""/>
-        <p:cNvGrpSpPr/>
-        <p:nvPr/>
-      </p:nvGrpSpPr>
-      <p:grpSpPr/>
-      <p:sp>
-        <p:nvSpPr>
-          <p:cNvPr id="2" name="Rectangle 1"/>
+              <a:t>33 new customers came from $8,600 of marketing in October, against 32 from $8,600 in September: $261 each, down from $269.</a:t>
+            </a:r>
+          </a:p>
+        </p:txBody>
+      </p:sp>
+      <p:sp>
+        <p:nvSpPr>
+          <p:cNvPr id="22" name="Rectangle 21"/>
           <p:cNvSpPr/>
           <p:nvPr/>
         </p:nvSpPr>
         <p:spPr>
           <a:xfrm>
-            <a:off x="0" y="0"/>
-            <a:ext cx="12191695" cy="73152"/>
+            <a:off x="6233007" y="5212080"/>
+            <a:ext cx="5501487" cy="1097280"/>
           </a:xfrm>
           <a:prstGeom prst="rect">
             <a:avLst/>
           </a:prstGeom>
           <a:solidFill>
-            <a:srgbClr val="2F7A5D"/>
+            <a:srgbClr val="EEF5F0"/>
           </a:solidFill>
           <a:ln>
-            <a:noFill/>
+            <a:solidFill>
+              <a:srgbClr val="DCE8DC"/>
+            </a:solidFill>
           </a:ln>
         </p:spPr>
         <p:style>
@@ -5153,14 +5152,14 @@
       </p:sp>
       <p:sp>
         <p:nvSpPr>
-          <p:cNvPr id="3" name="TextBox 2"/>
+          <p:cNvPr id="23" name="TextBox 22"/>
           <p:cNvSpPr txBox="1"/>
           <p:nvPr/>
         </p:nvSpPr>
         <p:spPr>
           <a:xfrm>
-            <a:off x="457200" y="164592"/>
-            <a:ext cx="7315200" cy="274320"/>
+            <a:off x="6370167" y="5266944"/>
+            <a:ext cx="5227167" cy="274320"/>
           </a:xfrm>
           <a:prstGeom prst="rect">
             <a:avLst/>
@@ -5168,7 +5167,7 @@
           <a:noFill/>
         </p:spPr>
         <p:txBody>
-          <a:bodyPr wrap="square">
+          <a:bodyPr wrap="square" lIns="45720" rIns="45720">
             <a:spAutoFit/>
           </a:bodyPr>
           <a:lstStyle/>
@@ -5179,27 +5178,27 @@
               </a:defRPr>
             </a:pPr>
             <a:r>
-              <a:rPr sz="1000" b="0">
+              <a:rPr sz="1000" b="1">
                 <a:solidFill>
                   <a:srgbClr val="5F6F63"/>
                 </a:solidFill>
                 <a:latin typeface="Roboto"/>
               </a:rPr>
-              <a:t>Sample Electrical &amp; Air Pty Ltd · What does it cost to win a customer?</a:t>
-            </a:r>
-          </a:p>
-        </p:txBody>
-      </p:sp>
-      <p:sp>
-        <p:nvSpPr>
-          <p:cNvPr id="4" name="TextBox 3"/>
+              <a:t>WHAT YOU'D DO ABOUT IT</a:t>
+            </a:r>
+          </a:p>
+        </p:txBody>
+      </p:sp>
+      <p:sp>
+        <p:nvSpPr>
+          <p:cNvPr id="24" name="TextBox 23"/>
           <p:cNvSpPr txBox="1"/>
           <p:nvPr/>
         </p:nvSpPr>
         <p:spPr>
           <a:xfrm>
-            <a:off x="457200" y="411480"/>
-            <a:ext cx="11247120" cy="548640"/>
+            <a:off x="6370167" y="5541264"/>
+            <a:ext cx="5227167" cy="731520"/>
           </a:xfrm>
           <a:prstGeom prst="rect">
             <a:avLst/>
@@ -5207,7 +5206,7 @@
           <a:noFill/>
         </p:spPr>
         <p:txBody>
-          <a:bodyPr wrap="square">
+          <a:bodyPr wrap="square" lIns="45720" rIns="45720">
             <a:spAutoFit/>
           </a:bodyPr>
           <a:lstStyle/>
@@ -5218,27 +5217,27 @@
               </a:defRPr>
             </a:pPr>
             <a:r>
-              <a:rPr sz="2400" b="1">
+              <a:rPr sz="1200" b="0">
                 <a:solidFill>
                   <a:srgbClr val="25342A"/>
                 </a:solidFill>
                 <a:latin typeface="Roboto"/>
               </a:rPr>
-              <a:t>Cost to win a customer, by month · New customers</a:t>
-            </a:r>
-          </a:p>
-        </p:txBody>
-      </p:sp>
-      <p:sp>
-        <p:nvSpPr>
-          <p:cNvPr id="5" name="TextBox 4"/>
+              <a:t>A lower cost per customer with steady spend usually means the marketing mix is working. Recording where each new customer came from shows the cost per channel.</a:t>
+            </a:r>
+          </a:p>
+        </p:txBody>
+      </p:sp>
+      <p:sp>
+        <p:nvSpPr>
+          <p:cNvPr id="25" name="TextBox 24"/>
           <p:cNvSpPr txBox="1"/>
           <p:nvPr/>
         </p:nvSpPr>
         <p:spPr>
           <a:xfrm>
-            <a:off x="457200" y="960120"/>
-            <a:ext cx="11247120" cy="457200"/>
+            <a:off x="457200" y="6492240"/>
+            <a:ext cx="2926080" cy="274320"/>
           </a:xfrm>
           <a:prstGeom prst="rect">
             <a:avLst/>
@@ -5246,7 +5245,7 @@
           <a:noFill/>
         </p:spPr>
         <p:txBody>
-          <a:bodyPr wrap="square">
+          <a:bodyPr wrap="square" lIns="45720" rIns="45720">
             <a:spAutoFit/>
           </a:bodyPr>
           <a:lstStyle/>
@@ -5257,45 +5256,27 @@
               </a:defRPr>
             </a:pPr>
             <a:r>
-              <a:rPr sz="1200" b="0">
+              <a:rPr sz="900" b="0">
                 <a:solidFill>
                   <a:srgbClr val="5F6F63"/>
                 </a:solidFill>
                 <a:latin typeface="Roboto"/>
               </a:rPr>
-              <a:t>Customers are counted in the month of their first job.</a:t>
-            </a:r>
-          </a:p>
-        </p:txBody>
-      </p:sp>
-      <p:graphicFrame>
-        <p:nvGraphicFramePr>
-          <p:cNvPr id="6" name="Chart 5"/>
-          <p:cNvGraphicFramePr>
-            <a:graphicFrameLocks noGrp="1"/>
-          </p:cNvGraphicFramePr>
-          <p:nvPr/>
-        </p:nvGraphicFramePr>
-        <p:xfrm>
-          <a:off x="457200" y="1463040"/>
-          <a:ext cx="11247120" cy="4754880"/>
-        </p:xfrm>
-        <a:graphic>
-          <a:graphicData uri="http://schemas.openxmlformats.org/drawingml/2006/chart">
-            <c:chart xmlns:c="http://schemas.openxmlformats.org/drawingml/2006/chart" r:id="rId2"/>
-          </a:graphicData>
-        </a:graphic>
-      </p:graphicFrame>
-      <p:sp>
-        <p:nvSpPr>
-          <p:cNvPr id="7" name="TextBox 6"/>
+              <a:t>cost-to-win.pptx</a:t>
+            </a:r>
+          </a:p>
+        </p:txBody>
+      </p:sp>
+      <p:sp>
+        <p:nvSpPr>
+          <p:cNvPr id="26" name="TextBox 25"/>
           <p:cNvSpPr txBox="1"/>
           <p:nvPr/>
         </p:nvSpPr>
         <p:spPr>
           <a:xfrm>
-            <a:off x="457200" y="6492240"/>
-            <a:ext cx="3657600" cy="274320"/>
+            <a:off x="3108960" y="6492240"/>
+            <a:ext cx="5943600" cy="274320"/>
           </a:xfrm>
           <a:prstGeom prst="rect">
             <a:avLst/>
@@ -5303,12 +5284,12 @@
           <a:noFill/>
         </p:spPr>
         <p:txBody>
-          <a:bodyPr wrap="square">
+          <a:bodyPr wrap="square" lIns="45720" rIns="45720">
             <a:spAutoFit/>
           </a:bodyPr>
           <a:lstStyle/>
           <a:p>
-            <a:pPr>
+            <a:pPr algn="ctr">
               <a:defRPr>
                 <a:latin typeface="Roboto"/>
               </a:defRPr>
@@ -5320,21 +5301,21 @@
                 </a:solidFill>
                 <a:latin typeface="Roboto"/>
               </a:rPr>
-              <a:t>cost-to-win.pptx</a:t>
-            </a:r>
-          </a:p>
-        </p:txBody>
-      </p:sp>
-      <p:sp>
-        <p:nvSpPr>
-          <p:cNvPr id="8" name="TextBox 7"/>
+              <a:t>Data retrieved 2pm, Tue 6 Oct 2026 · Generated 8 Oct 2026, 9:35am · Sample data · Made with Python (python-pptx)</a:t>
+            </a:r>
+          </a:p>
+        </p:txBody>
+      </p:sp>
+      <p:sp>
+        <p:nvSpPr>
+          <p:cNvPr id="27" name="TextBox 26"/>
           <p:cNvSpPr txBox="1"/>
           <p:nvPr/>
         </p:nvSpPr>
         <p:spPr>
           <a:xfrm>
-            <a:off x="4297680" y="6492240"/>
-            <a:ext cx="3657600" cy="274320"/>
+            <a:off x="8503920" y="6492240"/>
+            <a:ext cx="3200400" cy="274320"/>
           </a:xfrm>
           <a:prstGeom prst="rect">
             <a:avLst/>
@@ -5342,12 +5323,12 @@
           <a:noFill/>
         </p:spPr>
         <p:txBody>
-          <a:bodyPr wrap="square">
+          <a:bodyPr wrap="square" lIns="45720" rIns="45720">
             <a:spAutoFit/>
           </a:bodyPr>
           <a:lstStyle/>
           <a:p>
-            <a:pPr algn="ctr">
+            <a:pPr algn="r">
               <a:defRPr>
                 <a:latin typeface="Roboto"/>
               </a:defRPr>
@@ -5359,560 +5340,7 @@
                 </a:solidFill>
                 <a:latin typeface="Roboto"/>
               </a:rPr>
-              <a:t>Data retrieved 2pm, Tue 6 Oct 2026 · Sample data</a:t>
-            </a:r>
-          </a:p>
-        </p:txBody>
-      </p:sp>
-      <p:sp>
-        <p:nvSpPr>
-          <p:cNvPr id="9" name="TextBox 8"/>
-          <p:cNvSpPr txBox="1"/>
-          <p:nvPr/>
-        </p:nvSpPr>
-        <p:spPr>
-          <a:xfrm>
-            <a:off x="8503920" y="6492240"/>
-            <a:ext cx="3200400" cy="274320"/>
-          </a:xfrm>
-          <a:prstGeom prst="rect">
-            <a:avLst/>
-          </a:prstGeom>
-          <a:noFill/>
-        </p:spPr>
-        <p:txBody>
-          <a:bodyPr wrap="square">
-            <a:spAutoFit/>
-          </a:bodyPr>
-          <a:lstStyle/>
-          <a:p>
-            <a:pPr algn="r">
-              <a:defRPr>
-                <a:latin typeface="Roboto"/>
-              </a:defRPr>
-            </a:pPr>
-            <a:r>
-              <a:rPr sz="900" b="0">
-                <a:solidFill>
-                  <a:srgbClr val="5F6F63"/>
-                </a:solidFill>
-                <a:latin typeface="Roboto"/>
-              </a:rPr>
-              <a:t>Slide 4 of 5</a:t>
-            </a:r>
-          </a:p>
-        </p:txBody>
-      </p:sp>
-    </p:spTree>
-  </p:cSld>
-  <p:clrMapOvr>
-    <a:masterClrMapping/>
-  </p:clrMapOvr>
-</p:sld>
-</file>
-
-<file path=ppt/slides/slide5.xml><?xml version="1.0" encoding="utf-8"?>
-<p:sld xmlns:a="http://schemas.openxmlformats.org/drawingml/2006/main" xmlns:p="http://schemas.openxmlformats.org/presentationml/2006/main" xmlns:r="http://schemas.openxmlformats.org/officeDocument/2006/relationships">
-  <p:cSld>
-    <p:spTree>
-      <p:nvGrpSpPr>
-        <p:cNvPr id="1" name=""/>
-        <p:cNvGrpSpPr/>
-        <p:nvPr/>
-      </p:nvGrpSpPr>
-      <p:grpSpPr/>
-      <p:sp>
-        <p:nvSpPr>
-          <p:cNvPr id="2" name="Rectangle 1"/>
-          <p:cNvSpPr/>
-          <p:nvPr/>
-        </p:nvSpPr>
-        <p:spPr>
-          <a:xfrm>
-            <a:off x="0" y="0"/>
-            <a:ext cx="12191695" cy="73152"/>
-          </a:xfrm>
-          <a:prstGeom prst="rect">
-            <a:avLst/>
-          </a:prstGeom>
-          <a:solidFill>
-            <a:srgbClr val="2F7A5D"/>
-          </a:solidFill>
-          <a:ln>
-            <a:noFill/>
-          </a:ln>
-        </p:spPr>
-        <p:style>
-          <a:lnRef idx="1">
-            <a:schemeClr val="accent1"/>
-          </a:lnRef>
-          <a:fillRef idx="3">
-            <a:schemeClr val="accent1"/>
-          </a:fillRef>
-          <a:effectRef idx="2">
-            <a:schemeClr val="accent1"/>
-          </a:effectRef>
-          <a:fontRef idx="minor">
-            <a:schemeClr val="lt1"/>
-          </a:fontRef>
-        </p:style>
-        <p:txBody>
-          <a:bodyPr rtlCol="0" anchor="ctr"/>
-          <a:lstStyle/>
-          <a:p>
-            <a:pPr algn="ctr">
-              <a:defRPr>
-                <a:latin typeface="Roboto"/>
-              </a:defRPr>
-            </a:pPr>
-          </a:p>
-        </p:txBody>
-      </p:sp>
-      <p:sp>
-        <p:nvSpPr>
-          <p:cNvPr id="3" name="TextBox 2"/>
-          <p:cNvSpPr txBox="1"/>
-          <p:nvPr/>
-        </p:nvSpPr>
-        <p:spPr>
-          <a:xfrm>
-            <a:off x="457200" y="164592"/>
-            <a:ext cx="7315200" cy="274320"/>
-          </a:xfrm>
-          <a:prstGeom prst="rect">
-            <a:avLst/>
-          </a:prstGeom>
-          <a:noFill/>
-        </p:spPr>
-        <p:txBody>
-          <a:bodyPr wrap="square">
-            <a:spAutoFit/>
-          </a:bodyPr>
-          <a:lstStyle/>
-          <a:p>
-            <a:pPr>
-              <a:defRPr>
-                <a:latin typeface="Roboto"/>
-              </a:defRPr>
-            </a:pPr>
-            <a:r>
-              <a:rPr sz="1000" b="0">
-                <a:solidFill>
-                  <a:srgbClr val="5F6F63"/>
-                </a:solidFill>
-                <a:latin typeface="Roboto"/>
-              </a:rPr>
-              <a:t>Sample Electrical &amp; Air Pty Ltd · What does it cost to win a customer?</a:t>
-            </a:r>
-          </a:p>
-        </p:txBody>
-      </p:sp>
-      <p:sp>
-        <p:nvSpPr>
-          <p:cNvPr id="4" name="TextBox 3"/>
-          <p:cNvSpPr txBox="1"/>
-          <p:nvPr/>
-        </p:nvSpPr>
-        <p:spPr>
-          <a:xfrm>
-            <a:off x="457200" y="411480"/>
-            <a:ext cx="11247120" cy="548640"/>
-          </a:xfrm>
-          <a:prstGeom prst="rect">
-            <a:avLst/>
-          </a:prstGeom>
-          <a:noFill/>
-        </p:spPr>
-        <p:txBody>
-          <a:bodyPr wrap="square">
-            <a:spAutoFit/>
-          </a:bodyPr>
-          <a:lstStyle/>
-          <a:p>
-            <a:pPr>
-              <a:defRPr>
-                <a:latin typeface="Roboto"/>
-              </a:defRPr>
-            </a:pPr>
-            <a:r>
-              <a:rPr sz="2400" b="1">
-                <a:solidFill>
-                  <a:srgbClr val="25342A"/>
-                </a:solidFill>
-                <a:latin typeface="Roboto"/>
-              </a:rPr>
-              <a:t>What it shows</a:t>
-            </a:r>
-          </a:p>
-        </p:txBody>
-      </p:sp>
-      <p:sp>
-        <p:nvSpPr>
-          <p:cNvPr id="5" name="Rectangle 4"/>
-          <p:cNvSpPr/>
-          <p:nvPr/>
-        </p:nvSpPr>
-        <p:spPr>
-          <a:xfrm>
-            <a:off x="457200" y="1554480"/>
-            <a:ext cx="5501487" cy="4389120"/>
-          </a:xfrm>
-          <a:prstGeom prst="rect">
-            <a:avLst/>
-          </a:prstGeom>
-          <a:solidFill>
-            <a:srgbClr val="FFFFFF"/>
-          </a:solidFill>
-          <a:ln>
-            <a:solidFill>
-              <a:srgbClr val="DCE8DC"/>
-            </a:solidFill>
-          </a:ln>
-        </p:spPr>
-        <p:style>
-          <a:lnRef idx="1">
-            <a:schemeClr val="accent1"/>
-          </a:lnRef>
-          <a:fillRef idx="3">
-            <a:schemeClr val="accent1"/>
-          </a:fillRef>
-          <a:effectRef idx="2">
-            <a:schemeClr val="accent1"/>
-          </a:effectRef>
-          <a:fontRef idx="minor">
-            <a:schemeClr val="lt1"/>
-          </a:fontRef>
-        </p:style>
-        <p:txBody>
-          <a:bodyPr rtlCol="0" anchor="ctr"/>
-          <a:lstStyle/>
-          <a:p>
-            <a:pPr algn="ctr">
-              <a:defRPr>
-                <a:latin typeface="Roboto"/>
-              </a:defRPr>
-            </a:pPr>
-          </a:p>
-        </p:txBody>
-      </p:sp>
-      <p:sp>
-        <p:nvSpPr>
-          <p:cNvPr id="6" name="TextBox 5"/>
-          <p:cNvSpPr txBox="1"/>
-          <p:nvPr/>
-        </p:nvSpPr>
-        <p:spPr>
-          <a:xfrm>
-            <a:off x="685800" y="1691640"/>
-            <a:ext cx="5044287" cy="365760"/>
-          </a:xfrm>
-          <a:prstGeom prst="rect">
-            <a:avLst/>
-          </a:prstGeom>
-          <a:noFill/>
-        </p:spPr>
-        <p:txBody>
-          <a:bodyPr wrap="square">
-            <a:spAutoFit/>
-          </a:bodyPr>
-          <a:lstStyle/>
-          <a:p>
-            <a:pPr>
-              <a:defRPr>
-                <a:latin typeface="Roboto"/>
-              </a:defRPr>
-            </a:pPr>
-            <a:r>
-              <a:rPr sz="1100" b="1">
-                <a:solidFill>
-                  <a:srgbClr val="5F6F63"/>
-                </a:solidFill>
-                <a:latin typeface="Roboto"/>
-              </a:rPr>
-              <a:t>WHAT IT SHOWS</a:t>
-            </a:r>
-          </a:p>
-        </p:txBody>
-      </p:sp>
-      <p:sp>
-        <p:nvSpPr>
-          <p:cNvPr id="7" name="TextBox 6"/>
-          <p:cNvSpPr txBox="1"/>
-          <p:nvPr/>
-        </p:nvSpPr>
-        <p:spPr>
-          <a:xfrm>
-            <a:off x="685800" y="2103120"/>
-            <a:ext cx="5044287" cy="3749039"/>
-          </a:xfrm>
-          <a:prstGeom prst="rect">
-            <a:avLst/>
-          </a:prstGeom>
-          <a:noFill/>
-        </p:spPr>
-        <p:txBody>
-          <a:bodyPr wrap="square">
-            <a:spAutoFit/>
-          </a:bodyPr>
-          <a:lstStyle/>
-          <a:p>
-            <a:pPr>
-              <a:defRPr>
-                <a:latin typeface="Roboto"/>
-              </a:defRPr>
-            </a:pPr>
-            <a:r>
-              <a:rPr sz="1600" b="0">
-                <a:solidFill>
-                  <a:srgbClr val="25342A"/>
-                </a:solidFill>
-                <a:latin typeface="Roboto"/>
-              </a:rPr>
-              <a:t>33 new customers came from $8,600 of marketing in October, against 32 from $8,600 in September: $261 each, down from $269.</a:t>
-            </a:r>
-          </a:p>
-        </p:txBody>
-      </p:sp>
-      <p:sp>
-        <p:nvSpPr>
-          <p:cNvPr id="8" name="Rectangle 7"/>
-          <p:cNvSpPr/>
-          <p:nvPr/>
-        </p:nvSpPr>
-        <p:spPr>
-          <a:xfrm>
-            <a:off x="6233007" y="1554480"/>
-            <a:ext cx="5501487" cy="4389120"/>
-          </a:xfrm>
-          <a:prstGeom prst="rect">
-            <a:avLst/>
-          </a:prstGeom>
-          <a:solidFill>
-            <a:srgbClr val="EEF5F0"/>
-          </a:solidFill>
-          <a:ln>
-            <a:solidFill>
-              <a:srgbClr val="DCE8DC"/>
-            </a:solidFill>
-          </a:ln>
-        </p:spPr>
-        <p:style>
-          <a:lnRef idx="1">
-            <a:schemeClr val="accent1"/>
-          </a:lnRef>
-          <a:fillRef idx="3">
-            <a:schemeClr val="accent1"/>
-          </a:fillRef>
-          <a:effectRef idx="2">
-            <a:schemeClr val="accent1"/>
-          </a:effectRef>
-          <a:fontRef idx="minor">
-            <a:schemeClr val="lt1"/>
-          </a:fontRef>
-        </p:style>
-        <p:txBody>
-          <a:bodyPr rtlCol="0" anchor="ctr"/>
-          <a:lstStyle/>
-          <a:p>
-            <a:pPr algn="ctr">
-              <a:defRPr>
-                <a:latin typeface="Roboto"/>
-              </a:defRPr>
-            </a:pPr>
-          </a:p>
-        </p:txBody>
-      </p:sp>
-      <p:sp>
-        <p:nvSpPr>
-          <p:cNvPr id="9" name="TextBox 8"/>
-          <p:cNvSpPr txBox="1"/>
-          <p:nvPr/>
-        </p:nvSpPr>
-        <p:spPr>
-          <a:xfrm>
-            <a:off x="6461607" y="1691640"/>
-            <a:ext cx="5044287" cy="365760"/>
-          </a:xfrm>
-          <a:prstGeom prst="rect">
-            <a:avLst/>
-          </a:prstGeom>
-          <a:noFill/>
-        </p:spPr>
-        <p:txBody>
-          <a:bodyPr wrap="square">
-            <a:spAutoFit/>
-          </a:bodyPr>
-          <a:lstStyle/>
-          <a:p>
-            <a:pPr>
-              <a:defRPr>
-                <a:latin typeface="Roboto"/>
-              </a:defRPr>
-            </a:pPr>
-            <a:r>
-              <a:rPr sz="1100" b="1">
-                <a:solidFill>
-                  <a:srgbClr val="5F6F63"/>
-                </a:solidFill>
-                <a:latin typeface="Roboto"/>
-              </a:rPr>
-              <a:t>WHAT YOU'D DO ABOUT IT</a:t>
-            </a:r>
-          </a:p>
-        </p:txBody>
-      </p:sp>
-      <p:sp>
-        <p:nvSpPr>
-          <p:cNvPr id="10" name="TextBox 9"/>
-          <p:cNvSpPr txBox="1"/>
-          <p:nvPr/>
-        </p:nvSpPr>
-        <p:spPr>
-          <a:xfrm>
-            <a:off x="6461607" y="2103120"/>
-            <a:ext cx="5044287" cy="3749039"/>
-          </a:xfrm>
-          <a:prstGeom prst="rect">
-            <a:avLst/>
-          </a:prstGeom>
-          <a:noFill/>
-        </p:spPr>
-        <p:txBody>
-          <a:bodyPr wrap="square">
-            <a:spAutoFit/>
-          </a:bodyPr>
-          <a:lstStyle/>
-          <a:p>
-            <a:pPr>
-              <a:defRPr>
-                <a:latin typeface="Roboto"/>
-              </a:defRPr>
-            </a:pPr>
-            <a:r>
-              <a:rPr sz="1600" b="0">
-                <a:solidFill>
-                  <a:srgbClr val="25342A"/>
-                </a:solidFill>
-                <a:latin typeface="Roboto"/>
-              </a:rPr>
-              <a:t>A lower cost per customer with steady spend usually means the marketing mix is working. Recording where each new customer came from shows the cost per channel.</a:t>
-            </a:r>
-          </a:p>
-        </p:txBody>
-      </p:sp>
-      <p:sp>
-        <p:nvSpPr>
-          <p:cNvPr id="11" name="TextBox 10"/>
-          <p:cNvSpPr txBox="1"/>
-          <p:nvPr/>
-        </p:nvSpPr>
-        <p:spPr>
-          <a:xfrm>
-            <a:off x="457200" y="6492240"/>
-            <a:ext cx="3657600" cy="274320"/>
-          </a:xfrm>
-          <a:prstGeom prst="rect">
-            <a:avLst/>
-          </a:prstGeom>
-          <a:noFill/>
-        </p:spPr>
-        <p:txBody>
-          <a:bodyPr wrap="square">
-            <a:spAutoFit/>
-          </a:bodyPr>
-          <a:lstStyle/>
-          <a:p>
-            <a:pPr>
-              <a:defRPr>
-                <a:latin typeface="Roboto"/>
-              </a:defRPr>
-            </a:pPr>
-            <a:r>
-              <a:rPr sz="900" b="0">
-                <a:solidFill>
-                  <a:srgbClr val="5F6F63"/>
-                </a:solidFill>
-                <a:latin typeface="Roboto"/>
-              </a:rPr>
-              <a:t>cost-to-win.pptx</a:t>
-            </a:r>
-          </a:p>
-        </p:txBody>
-      </p:sp>
-      <p:sp>
-        <p:nvSpPr>
-          <p:cNvPr id="12" name="TextBox 11"/>
-          <p:cNvSpPr txBox="1"/>
-          <p:nvPr/>
-        </p:nvSpPr>
-        <p:spPr>
-          <a:xfrm>
-            <a:off x="4297680" y="6492240"/>
-            <a:ext cx="3657600" cy="274320"/>
-          </a:xfrm>
-          <a:prstGeom prst="rect">
-            <a:avLst/>
-          </a:prstGeom>
-          <a:noFill/>
-        </p:spPr>
-        <p:txBody>
-          <a:bodyPr wrap="square">
-            <a:spAutoFit/>
-          </a:bodyPr>
-          <a:lstStyle/>
-          <a:p>
-            <a:pPr algn="ctr">
-              <a:defRPr>
-                <a:latin typeface="Roboto"/>
-              </a:defRPr>
-            </a:pPr>
-            <a:r>
-              <a:rPr sz="900" b="0">
-                <a:solidFill>
-                  <a:srgbClr val="5F6F63"/>
-                </a:solidFill>
-                <a:latin typeface="Roboto"/>
-              </a:rPr>
-              <a:t>Data retrieved 2pm, Tue 6 Oct 2026 · Sample data</a:t>
-            </a:r>
-          </a:p>
-        </p:txBody>
-      </p:sp>
-      <p:sp>
-        <p:nvSpPr>
-          <p:cNvPr id="13" name="TextBox 12"/>
-          <p:cNvSpPr txBox="1"/>
-          <p:nvPr/>
-        </p:nvSpPr>
-        <p:spPr>
-          <a:xfrm>
-            <a:off x="8503920" y="6492240"/>
-            <a:ext cx="3200400" cy="274320"/>
-          </a:xfrm>
-          <a:prstGeom prst="rect">
-            <a:avLst/>
-          </a:prstGeom>
-          <a:noFill/>
-        </p:spPr>
-        <p:txBody>
-          <a:bodyPr wrap="square">
-            <a:spAutoFit/>
-          </a:bodyPr>
-          <a:lstStyle/>
-          <a:p>
-            <a:pPr algn="r">
-              <a:defRPr>
-                <a:latin typeface="Roboto"/>
-              </a:defRPr>
-            </a:pPr>
-            <a:r>
-              <a:rPr sz="900" b="0">
-                <a:solidFill>
-                  <a:srgbClr val="5F6F63"/>
-                </a:solidFill>
-                <a:latin typeface="Roboto"/>
-              </a:rPr>
-              <a:t>Slide 5 of 5</a:t>
+              <a:t>Slide 2 of 2</a:t>
             </a:r>
           </a:p>
         </p:txBody>
@@ -5926,6 +5354,326 @@
 </file>
 
 <file path=ppt/theme/theme1.xml><?xml version="1.0" encoding="utf-8"?>
+<a:theme xmlns:a="http://schemas.openxmlformats.org/drawingml/2006/main" name="Office Theme">
+  <a:themeElements>
+    <a:clrScheme name="Office">
+      <a:dk1>
+        <a:sysClr val="windowText" lastClr="000000"/>
+      </a:dk1>
+      <a:lt1>
+        <a:sysClr val="window" lastClr="FFFFFF"/>
+      </a:lt1>
+      <a:dk2>
+        <a:srgbClr val="25342A"/>
+      </a:dk2>
+      <a:lt2>
+        <a:srgbClr val="F4F7F2"/>
+      </a:lt2>
+      <a:accent1>
+        <a:srgbClr val="2F7A5D"/>
+      </a:accent1>
+      <a:accent2>
+        <a:srgbClr val="0E9F6E"/>
+      </a:accent2>
+      <a:accent3>
+        <a:srgbClr val="7D8790"/>
+      </a:accent3>
+      <a:accent4>
+        <a:srgbClr val="8A6D3B"/>
+      </a:accent4>
+      <a:accent5>
+        <a:srgbClr val="B42318"/>
+      </a:accent5>
+      <a:accent6>
+        <a:srgbClr val="8E9CAB"/>
+      </a:accent6>
+      <a:hlink>
+        <a:srgbClr val="0000FF"/>
+      </a:hlink>
+      <a:folHlink>
+        <a:srgbClr val="800080"/>
+      </a:folHlink>
+    </a:clrScheme>
+    <a:fontScheme name="Office">
+      <a:majorFont>
+        <a:latin typeface="Roboto"/>
+        <a:ea typeface=""/>
+        <a:cs typeface=""/>
+        <a:font script="Jpan" typeface="ＭＳ Ｐゴシック"/>
+        <a:font script="Hang" typeface="맑은 고딕"/>
+        <a:font script="Hans" typeface="宋体"/>
+        <a:font script="Hant" typeface="新細明體"/>
+        <a:font script="Arab" typeface="Times New Roman"/>
+        <a:font script="Hebr" typeface="Times New Roman"/>
+        <a:font script="Thai" typeface="Angsana New"/>
+        <a:font script="Ethi" typeface="Nyala"/>
+        <a:font script="Beng" typeface="Vrinda"/>
+        <a:font script="Gujr" typeface="Shruti"/>
+        <a:font script="Khmr" typeface="MoolBoran"/>
+        <a:font script="Knda" typeface="Tunga"/>
+        <a:font script="Guru" typeface="Raavi"/>
+        <a:font script="Cans" typeface="Euphemia"/>
+        <a:font script="Cher" typeface="Plantagenet Cherokee"/>
+        <a:font script="Yiii" typeface="Microsoft Yi Baiti"/>
+        <a:font script="Tibt" typeface="Microsoft Himalaya"/>
+        <a:font script="Thaa" typeface="MV Boli"/>
+        <a:font script="Deva" typeface="Mangal"/>
+        <a:font script="Telu" typeface="Gautami"/>
+        <a:font script="Taml" typeface="Latha"/>
+        <a:font script="Syrc" typeface="Estrangelo Edessa"/>
+        <a:font script="Orya" typeface="Kalinga"/>
+        <a:font script="Mlym" typeface="Kartika"/>
+        <a:font script="Laoo" typeface="DokChampa"/>
+        <a:font script="Sinh" typeface="Iskoola Pota"/>
+        <a:font script="Mong" typeface="Mongolian Baiti"/>
+        <a:font script="Viet" typeface="Times New Roman"/>
+        <a:font script="Uigh" typeface="Microsoft Uighur"/>
+        <a:font script="Geor" typeface="Sylfaen"/>
+      </a:majorFont>
+      <a:minorFont>
+        <a:latin typeface="Roboto"/>
+        <a:ea typeface=""/>
+        <a:cs typeface=""/>
+        <a:font script="Jpan" typeface="ＭＳ Ｐゴシック"/>
+        <a:font script="Hang" typeface="맑은 고딕"/>
+        <a:font script="Hans" typeface="宋体"/>
+        <a:font script="Hant" typeface="新細明體"/>
+        <a:font script="Arab" typeface="Arial"/>
+        <a:font script="Hebr" typeface="Arial"/>
+        <a:font script="Thai" typeface="Cordia New"/>
+        <a:font script="Ethi" typeface="Nyala"/>
+        <a:font script="Beng" typeface="Vrinda"/>
+        <a:font script="Gujr" typeface="Shruti"/>
+        <a:font script="Khmr" typeface="DaunPenh"/>
+        <a:font script="Knda" typeface="Tunga"/>
+        <a:font script="Guru" typeface="Raavi"/>
+        <a:font script="Cans" typeface="Euphemia"/>
+        <a:font script="Cher" typeface="Plantagenet Cherokee"/>
+        <a:font script="Yiii" typeface="Microsoft Yi Baiti"/>
+        <a:font script="Tibt" typeface="Microsoft Himalaya"/>
+        <a:font script="Thaa" typeface="MV Boli"/>
+        <a:font script="Deva" typeface="Mangal"/>
+        <a:font script="Telu" typeface="Gautami"/>
+        <a:font script="Taml" typeface="Latha"/>
+        <a:font script="Syrc" typeface="Estrangelo Edessa"/>
+        <a:font script="Orya" typeface="Kalinga"/>
+        <a:font script="Mlym" typeface="Kartika"/>
+        <a:font script="Laoo" typeface="DokChampa"/>
+        <a:font script="Sinh" typeface="Iskoola Pota"/>
+        <a:font script="Mong" typeface="Mongolian Baiti"/>
+        <a:font script="Viet" typeface="Arial"/>
+        <a:font script="Uigh" typeface="Microsoft Uighur"/>
+        <a:font script="Geor" typeface="Sylfaen"/>
+      </a:minorFont>
+    </a:fontScheme>
+    <a:fmtScheme name="Office">
+      <a:fillStyleLst>
+        <a:solidFill>
+          <a:schemeClr val="phClr"/>
+        </a:solidFill>
+        <a:gradFill rotWithShape="1">
+          <a:gsLst>
+            <a:gs pos="0">
+              <a:schemeClr val="phClr">
+                <a:tint val="50000"/>
+                <a:satMod val="300000"/>
+              </a:schemeClr>
+            </a:gs>
+            <a:gs pos="35000">
+              <a:schemeClr val="phClr">
+                <a:tint val="37000"/>
+                <a:satMod val="300000"/>
+              </a:schemeClr>
+            </a:gs>
+            <a:gs pos="100000">
+              <a:schemeClr val="phClr">
+                <a:tint val="15000"/>
+                <a:satMod val="350000"/>
+              </a:schemeClr>
+            </a:gs>
+          </a:gsLst>
+          <a:lin ang="16200000" scaled="1"/>
+        </a:gradFill>
+        <a:gradFill rotWithShape="1">
+          <a:gsLst>
+            <a:gs pos="0">
+              <a:schemeClr val="phClr">
+                <a:tint val="100000"/>
+                <a:shade val="100000"/>
+                <a:satMod val="130000"/>
+              </a:schemeClr>
+            </a:gs>
+            <a:gs pos="100000">
+              <a:schemeClr val="phClr">
+                <a:tint val="50000"/>
+                <a:shade val="100000"/>
+                <a:satMod val="350000"/>
+              </a:schemeClr>
+            </a:gs>
+          </a:gsLst>
+          <a:lin ang="16200000" scaled="0"/>
+        </a:gradFill>
+      </a:fillStyleLst>
+      <a:lnStyleLst>
+        <a:ln w="9525" cap="flat" cmpd="sng" algn="ctr">
+          <a:solidFill>
+            <a:schemeClr val="phClr">
+              <a:shade val="95000"/>
+              <a:satMod val="105000"/>
+            </a:schemeClr>
+          </a:solidFill>
+          <a:prstDash val="solid"/>
+        </a:ln>
+        <a:ln w="25400" cap="flat" cmpd="sng" algn="ctr">
+          <a:solidFill>
+            <a:schemeClr val="phClr"/>
+          </a:solidFill>
+          <a:prstDash val="solid"/>
+        </a:ln>
+        <a:ln w="38100" cap="flat" cmpd="sng" algn="ctr">
+          <a:solidFill>
+            <a:schemeClr val="phClr"/>
+          </a:solidFill>
+          <a:prstDash val="solid"/>
+        </a:ln>
+      </a:lnStyleLst>
+      <a:effectStyleLst>
+        <a:effectStyle>
+          <a:effectLst>
+            <a:outerShdw blurRad="40000" dist="20000" dir="5400000" rotWithShape="0">
+              <a:srgbClr val="000000">
+                <a:alpha val="38000"/>
+              </a:srgbClr>
+            </a:outerShdw>
+          </a:effectLst>
+        </a:effectStyle>
+        <a:effectStyle>
+          <a:effectLst>
+            <a:outerShdw blurRad="40000" dist="23000" dir="5400000" rotWithShape="0">
+              <a:srgbClr val="000000">
+                <a:alpha val="35000"/>
+              </a:srgbClr>
+            </a:outerShdw>
+          </a:effectLst>
+        </a:effectStyle>
+        <a:effectStyle>
+          <a:effectLst>
+            <a:outerShdw blurRad="40000" dist="23000" dir="5400000" rotWithShape="0">
+              <a:srgbClr val="000000">
+                <a:alpha val="35000"/>
+              </a:srgbClr>
+            </a:outerShdw>
+          </a:effectLst>
+          <a:scene3d>
+            <a:camera prst="orthographicFront">
+              <a:rot lat="0" lon="0" rev="0"/>
+            </a:camera>
+            <a:lightRig rig="threePt" dir="t">
+              <a:rot lat="0" lon="0" rev="1200000"/>
+            </a:lightRig>
+          </a:scene3d>
+          <a:sp3d>
+            <a:bevelT w="63500" h="25400"/>
+          </a:sp3d>
+        </a:effectStyle>
+      </a:effectStyleLst>
+      <a:bgFillStyleLst>
+        <a:solidFill>
+          <a:schemeClr val="phClr"/>
+        </a:solidFill>
+        <a:gradFill rotWithShape="1">
+          <a:gsLst>
+            <a:gs pos="0">
+              <a:schemeClr val="phClr">
+                <a:tint val="40000"/>
+                <a:satMod val="350000"/>
+              </a:schemeClr>
+            </a:gs>
+            <a:gs pos="40000">
+              <a:schemeClr val="phClr">
+                <a:tint val="45000"/>
+                <a:shade val="99000"/>
+                <a:satMod val="350000"/>
+              </a:schemeClr>
+            </a:gs>
+            <a:gs pos="100000">
+              <a:schemeClr val="phClr">
+                <a:shade val="20000"/>
+                <a:satMod val="255000"/>
+              </a:schemeClr>
+            </a:gs>
+          </a:gsLst>
+          <a:path path="circle">
+            <a:fillToRect l="50000" t="-80000" r="50000" b="180000"/>
+          </a:path>
+        </a:gradFill>
+        <a:gradFill rotWithShape="1">
+          <a:gsLst>
+            <a:gs pos="0">
+              <a:schemeClr val="phClr">
+                <a:tint val="80000"/>
+                <a:satMod val="300000"/>
+              </a:schemeClr>
+            </a:gs>
+            <a:gs pos="100000">
+              <a:schemeClr val="phClr">
+                <a:shade val="30000"/>
+                <a:satMod val="200000"/>
+              </a:schemeClr>
+            </a:gs>
+          </a:gsLst>
+          <a:path path="circle">
+            <a:fillToRect l="50000" t="50000" r="50000" b="50000"/>
+          </a:path>
+        </a:gradFill>
+      </a:bgFillStyleLst>
+    </a:fmtScheme>
+  </a:themeElements>
+  <a:objectDefaults>
+    <a:spDef>
+      <a:spPr/>
+      <a:bodyPr/>
+      <a:lstStyle/>
+      <a:style>
+        <a:lnRef idx="1">
+          <a:schemeClr val="accent1"/>
+        </a:lnRef>
+        <a:fillRef idx="3">
+          <a:schemeClr val="accent1"/>
+        </a:fillRef>
+        <a:effectRef idx="2">
+          <a:schemeClr val="accent1"/>
+        </a:effectRef>
+        <a:fontRef idx="minor">
+          <a:schemeClr val="lt1"/>
+        </a:fontRef>
+      </a:style>
+    </a:spDef>
+    <a:lnDef>
+      <a:spPr/>
+      <a:bodyPr/>
+      <a:lstStyle/>
+      <a:style>
+        <a:lnRef idx="2">
+          <a:schemeClr val="accent1"/>
+        </a:lnRef>
+        <a:fillRef idx="0">
+          <a:schemeClr val="accent1"/>
+        </a:fillRef>
+        <a:effectRef idx="1">
+          <a:schemeClr val="accent1"/>
+        </a:effectRef>
+        <a:fontRef idx="minor">
+          <a:schemeClr val="tx1"/>
+        </a:fontRef>
+      </a:style>
+    </a:lnDef>
+  </a:objectDefaults>
+  <a:extraClrSchemeLst/>
+</a:theme>
+</file>
+
+<file path=ppt/theme/theme2.xml><?xml version="1.0" encoding="utf-8"?>
 <a:theme xmlns:a="http://schemas.openxmlformats.org/drawingml/2006/main" name="Office Theme">
   <a:themeElements>
     <a:clrScheme name="Office">

--- a/media/exports/reports/2025-10/cost-to-win.pptx
+++ b/media/exports/reports/2025-10/cost-to-win.pptx
@@ -749,7 +749,7 @@
           <a:lstStyle/>
           <a:p>
             <a:r>
-              <a:t>What does it cost to win a customer?. Sample Electrical &amp; Air Pty Ltd. Period: October 2025. Marketing spend divided by the customers it actually brought in (a customer's first ever job), month by month.</a:t>
+              <a:t>What does it cost to win a customer?. Sample Electrical &amp; Air Pty Ltd. Period: October 2025. In short: $261 per new customer in October: 33 new customers from $8,600 of marketing. Marketing spend divided by the customers it actually brought in (a customer's first ever job), month by month.</a:t>
             </a:r>
           </a:p>
         </p:txBody>
@@ -4069,7 +4069,7 @@
                 </a:solidFill>
                 <a:latin typeface="Roboto"/>
               </a:rPr>
-              <a:t>Period: October 2025. Marketing spend divided by the customers it actually brought in (a customer's first ever job), month by month.</a:t>
+              <a:t>Period: October 2025. In short: $261 per new customer in October: 33 new customers from $8,600 of marketing. Marketing spend divided by the customers it actually brought in (a customer's first ever job), month by month.</a:t>
             </a:r>
           </a:p>
         </p:txBody>
@@ -4234,7 +4234,7 @@
                 </a:solidFill>
                 <a:latin typeface="Roboto"/>
               </a:rPr>
-              <a:t>Data retrieved 2pm, Tue 6 Oct 2026 · Generated 8 Oct 2026, 9:35am · Sample data · Made with Python (python-pptx)</a:t>
+              <a:t>Data retrieved 2pm, Tue 6 Oct 2026 · Generated 10 Oct 2026, 9:55pm · Sample data · Made with Python (python-pptx)</a:t>
             </a:r>
           </a:p>
         </p:txBody>
@@ -5301,7 +5301,7 @@
                 </a:solidFill>
                 <a:latin typeface="Roboto"/>
               </a:rPr>
-              <a:t>Data retrieved 2pm, Tue 6 Oct 2026 · Generated 8 Oct 2026, 9:35am · Sample data · Made with Python (python-pptx)</a:t>
+              <a:t>Data retrieved 2pm, Tue 6 Oct 2026 · Generated 10 Oct 2026, 9:55pm · Sample data · Made with Python (python-pptx)</a:t>
             </a:r>
           </a:p>
         </p:txBody>
